--- a/graphic.pptx
+++ b/graphic.pptx
@@ -2,18 +2,19 @@
 <file path=ppt/presentation.xml><?xml version="1.0" encoding="utf-8"?>
 <p:presentation xmlns:a="http://schemas.openxmlformats.org/drawingml/2006/main" xmlns:r="http://schemas.openxmlformats.org/officeDocument/2006/relationships" xmlns:p="http://schemas.openxmlformats.org/presentationml/2006/main" saveSubsetFonts="1" autoCompressPictures="0">
   <p:sldMasterIdLst>
-    <p:sldMasterId id="2147483648" r:id="rId1"/>
+    <p:sldMasterId id="2147483660" r:id="rId1"/>
   </p:sldMasterIdLst>
   <p:sldIdLst>
-    <p:sldId id="256" r:id="rId2"/>
+    <p:sldId id="257" r:id="rId2"/>
+    <p:sldId id="256" r:id="rId3"/>
   </p:sldIdLst>
   <p:sldSz cx="12192000" cy="6858000"/>
   <p:notesSz cx="6858000" cy="9144000"/>
   <p:defaultTextStyle>
     <a:defPPr>
-      <a:defRPr lang="en-TH"/>
+      <a:defRPr lang="en-US"/>
     </a:defPPr>
-    <a:lvl1pPr marL="0" algn="l" defTabSz="914400" rtl="0" eaLnBrk="1" latinLnBrk="0" hangingPunct="1">
+    <a:lvl1pPr marL="0" algn="l" defTabSz="457200" rtl="0" eaLnBrk="1" latinLnBrk="0" hangingPunct="1">
       <a:defRPr sz="1800" kern="1200">
         <a:solidFill>
           <a:schemeClr val="tx1"/>
@@ -23,7 +24,7 @@
         <a:cs typeface="+mn-cs"/>
       </a:defRPr>
     </a:lvl1pPr>
-    <a:lvl2pPr marL="457200" algn="l" defTabSz="914400" rtl="0" eaLnBrk="1" latinLnBrk="0" hangingPunct="1">
+    <a:lvl2pPr marL="457200" algn="l" defTabSz="457200" rtl="0" eaLnBrk="1" latinLnBrk="0" hangingPunct="1">
       <a:defRPr sz="1800" kern="1200">
         <a:solidFill>
           <a:schemeClr val="tx1"/>
@@ -33,7 +34,7 @@
         <a:cs typeface="+mn-cs"/>
       </a:defRPr>
     </a:lvl2pPr>
-    <a:lvl3pPr marL="914400" algn="l" defTabSz="914400" rtl="0" eaLnBrk="1" latinLnBrk="0" hangingPunct="1">
+    <a:lvl3pPr marL="914400" algn="l" defTabSz="457200" rtl="0" eaLnBrk="1" latinLnBrk="0" hangingPunct="1">
       <a:defRPr sz="1800" kern="1200">
         <a:solidFill>
           <a:schemeClr val="tx1"/>
@@ -43,7 +44,7 @@
         <a:cs typeface="+mn-cs"/>
       </a:defRPr>
     </a:lvl3pPr>
-    <a:lvl4pPr marL="1371600" algn="l" defTabSz="914400" rtl="0" eaLnBrk="1" latinLnBrk="0" hangingPunct="1">
+    <a:lvl4pPr marL="1371600" algn="l" defTabSz="457200" rtl="0" eaLnBrk="1" latinLnBrk="0" hangingPunct="1">
       <a:defRPr sz="1800" kern="1200">
         <a:solidFill>
           <a:schemeClr val="tx1"/>
@@ -53,7 +54,7 @@
         <a:cs typeface="+mn-cs"/>
       </a:defRPr>
     </a:lvl4pPr>
-    <a:lvl5pPr marL="1828800" algn="l" defTabSz="914400" rtl="0" eaLnBrk="1" latinLnBrk="0" hangingPunct="1">
+    <a:lvl5pPr marL="1828800" algn="l" defTabSz="457200" rtl="0" eaLnBrk="1" latinLnBrk="0" hangingPunct="1">
       <a:defRPr sz="1800" kern="1200">
         <a:solidFill>
           <a:schemeClr val="tx1"/>
@@ -63,7 +64,7 @@
         <a:cs typeface="+mn-cs"/>
       </a:defRPr>
     </a:lvl5pPr>
-    <a:lvl6pPr marL="2286000" algn="l" defTabSz="914400" rtl="0" eaLnBrk="1" latinLnBrk="0" hangingPunct="1">
+    <a:lvl6pPr marL="2286000" algn="l" defTabSz="457200" rtl="0" eaLnBrk="1" latinLnBrk="0" hangingPunct="1">
       <a:defRPr sz="1800" kern="1200">
         <a:solidFill>
           <a:schemeClr val="tx1"/>
@@ -73,7 +74,7 @@
         <a:cs typeface="+mn-cs"/>
       </a:defRPr>
     </a:lvl6pPr>
-    <a:lvl7pPr marL="2743200" algn="l" defTabSz="914400" rtl="0" eaLnBrk="1" latinLnBrk="0" hangingPunct="1">
+    <a:lvl7pPr marL="2743200" algn="l" defTabSz="457200" rtl="0" eaLnBrk="1" latinLnBrk="0" hangingPunct="1">
       <a:defRPr sz="1800" kern="1200">
         <a:solidFill>
           <a:schemeClr val="tx1"/>
@@ -83,7 +84,7 @@
         <a:cs typeface="+mn-cs"/>
       </a:defRPr>
     </a:lvl7pPr>
-    <a:lvl8pPr marL="3200400" algn="l" defTabSz="914400" rtl="0" eaLnBrk="1" latinLnBrk="0" hangingPunct="1">
+    <a:lvl8pPr marL="3200400" algn="l" defTabSz="457200" rtl="0" eaLnBrk="1" latinLnBrk="0" hangingPunct="1">
       <a:defRPr sz="1800" kern="1200">
         <a:solidFill>
           <a:schemeClr val="tx1"/>
@@ -93,7 +94,7 @@
         <a:cs typeface="+mn-cs"/>
       </a:defRPr>
     </a:lvl8pPr>
-    <a:lvl9pPr marL="3657600" algn="l" defTabSz="914400" rtl="0" eaLnBrk="1" latinLnBrk="0" hangingPunct="1">
+    <a:lvl9pPr marL="3657600" algn="l" defTabSz="457200" rtl="0" eaLnBrk="1" latinLnBrk="0" hangingPunct="1">
       <a:defRPr sz="1800" kern="1200">
         <a:solidFill>
           <a:schemeClr val="tx1"/>
@@ -110,6 +111,14 @@
 <file path=ppt/slideLayouts/slideLayout1.xml><?xml version="1.0" encoding="utf-8"?>
 <p:sldLayout xmlns:a="http://schemas.openxmlformats.org/drawingml/2006/main" xmlns:r="http://schemas.openxmlformats.org/officeDocument/2006/relationships" xmlns:p="http://schemas.openxmlformats.org/presentationml/2006/main" type="title" preserve="1">
   <p:cSld name="Title Slide">
+    <p:bg>
+      <p:bgPr>
+        <a:solidFill>
+          <a:schemeClr val="accent2"/>
+        </a:solidFill>
+        <a:effectLst/>
+      </p:bgPr>
+    </p:bg>
     <p:spTree>
       <p:nvGrpSpPr>
         <p:cNvPr id="1" name=""/>
@@ -126,70 +135,82 @@
       </p:grpSpPr>
       <p:sp>
         <p:nvSpPr>
-          <p:cNvPr id="2" name="Title 1">
-            <a:extLst>
-              <a:ext uri="{FF2B5EF4-FFF2-40B4-BE49-F238E27FC236}">
-                <a16:creationId xmlns:a16="http://schemas.microsoft.com/office/drawing/2014/main" id="{FC1ADB9B-27CC-7E8A-7303-2F8391A796F6}"/>
-              </a:ext>
-            </a:extLst>
-          </p:cNvPr>
+          <p:cNvPr id="2" name="Title 1"/>
           <p:cNvSpPr>
             <a:spLocks noGrp="1"/>
           </p:cNvSpPr>
           <p:nvPr>
             <p:ph type="ctrTitle"/>
+          </p:nvPr>
+        </p:nvSpPr>
+        <p:spPr bwMode="blackWhite">
+          <a:xfrm>
+            <a:off x="1600200" y="2386744"/>
+            <a:ext cx="8991600" cy="1645920"/>
+          </a:xfrm>
+          <a:solidFill>
+            <a:srgbClr val="FFFFFF"/>
+          </a:solidFill>
+          <a:ln w="38100">
+            <a:solidFill>
+              <a:srgbClr val="404040"/>
+            </a:solidFill>
+          </a:ln>
+        </p:spPr>
+        <p:txBody>
+          <a:bodyPr lIns="274320" rIns="274320" anchor="ctr" anchorCtr="1">
+            <a:normAutofit/>
+          </a:bodyPr>
+          <a:lstStyle>
+            <a:lvl1pPr algn="ctr">
+              <a:defRPr sz="3800">
+                <a:solidFill>
+                  <a:srgbClr val="262626"/>
+                </a:solidFill>
+              </a:defRPr>
+            </a:lvl1pPr>
+          </a:lstStyle>
+          <a:p>
+            <a:r>
+              <a:rPr lang="en-US"/>
+              <a:t>Click to edit Master title style</a:t>
+            </a:r>
+            <a:endParaRPr lang="en-US" dirty="0"/>
+          </a:p>
+        </p:txBody>
+      </p:sp>
+      <p:sp>
+        <p:nvSpPr>
+          <p:cNvPr id="3" name="Subtitle 2"/>
+          <p:cNvSpPr>
+            <a:spLocks noGrp="1"/>
+          </p:cNvSpPr>
+          <p:nvPr>
+            <p:ph type="subTitle" idx="1"/>
           </p:nvPr>
         </p:nvSpPr>
         <p:spPr>
           <a:xfrm>
-            <a:off x="1524000" y="1122363"/>
-            <a:ext cx="9144000" cy="2387600"/>
+            <a:off x="2695194" y="4352544"/>
+            <a:ext cx="6801612" cy="1239894"/>
           </a:xfrm>
+          <a:noFill/>
         </p:spPr>
         <p:txBody>
-          <a:bodyPr anchor="b"/>
-          <a:lstStyle>
-            <a:lvl1pPr algn="ctr">
-              <a:defRPr sz="6000"/>
-            </a:lvl1pPr>
-          </a:lstStyle>
-          <a:p>
-            <a:r>
-              <a:rPr lang="en-US"/>
-              <a:t>Click to edit Master title style</a:t>
-            </a:r>
-            <a:endParaRPr lang="en-TH"/>
-          </a:p>
-        </p:txBody>
-      </p:sp>
-      <p:sp>
-        <p:nvSpPr>
-          <p:cNvPr id="3" name="Subtitle 2">
-            <a:extLst>
-              <a:ext uri="{FF2B5EF4-FFF2-40B4-BE49-F238E27FC236}">
-                <a16:creationId xmlns:a16="http://schemas.microsoft.com/office/drawing/2014/main" id="{F8C36CAA-0E20-9659-1442-85AAE48AF4FE}"/>
-              </a:ext>
-            </a:extLst>
-          </p:cNvPr>
-          <p:cNvSpPr>
-            <a:spLocks noGrp="1"/>
-          </p:cNvSpPr>
-          <p:nvPr>
-            <p:ph type="subTitle" idx="1"/>
-          </p:nvPr>
-        </p:nvSpPr>
-        <p:spPr>
-          <a:xfrm>
-            <a:off x="1524000" y="3602038"/>
-            <a:ext cx="9144000" cy="1655762"/>
-          </a:xfrm>
-        </p:spPr>
-        <p:txBody>
-          <a:bodyPr/>
+          <a:bodyPr>
+            <a:normAutofit/>
+          </a:bodyPr>
           <a:lstStyle>
             <a:lvl1pPr marL="0" indent="0" algn="ctr">
               <a:buNone/>
-              <a:defRPr sz="2400"/>
+              <a:defRPr sz="2000">
+                <a:solidFill>
+                  <a:schemeClr val="tx1">
+                    <a:lumMod val="75000"/>
+                    <a:lumOff val="25000"/>
+                  </a:schemeClr>
+                </a:solidFill>
+              </a:defRPr>
             </a:lvl1pPr>
             <a:lvl2pPr marL="457200" indent="0" algn="ctr">
               <a:buNone/>
@@ -229,19 +250,13 @@
               <a:rPr lang="en-US"/>
               <a:t>Click to edit Master subtitle style</a:t>
             </a:r>
-            <a:endParaRPr lang="en-TH"/>
-          </a:p>
-        </p:txBody>
-      </p:sp>
-      <p:sp>
-        <p:nvSpPr>
-          <p:cNvPr id="4" name="Date Placeholder 3">
-            <a:extLst>
-              <a:ext uri="{FF2B5EF4-FFF2-40B4-BE49-F238E27FC236}">
-                <a16:creationId xmlns:a16="http://schemas.microsoft.com/office/drawing/2014/main" id="{B89D2DE2-422C-AE7A-5BBC-DBE71DBC4D79}"/>
-              </a:ext>
-            </a:extLst>
-          </p:cNvPr>
+            <a:endParaRPr lang="en-US" dirty="0"/>
+          </a:p>
+        </p:txBody>
+      </p:sp>
+      <p:sp>
+        <p:nvSpPr>
+          <p:cNvPr id="7" name="Date Placeholder 6"/>
           <p:cNvSpPr>
             <a:spLocks noGrp="1"/>
           </p:cNvSpPr>
@@ -264,13 +279,7 @@
       </p:sp>
       <p:sp>
         <p:nvSpPr>
-          <p:cNvPr id="5" name="Footer Placeholder 4">
-            <a:extLst>
-              <a:ext uri="{FF2B5EF4-FFF2-40B4-BE49-F238E27FC236}">
-                <a16:creationId xmlns:a16="http://schemas.microsoft.com/office/drawing/2014/main" id="{303EC982-89E2-2446-EE6F-103C73F85DC1}"/>
-              </a:ext>
-            </a:extLst>
-          </p:cNvPr>
+          <p:cNvPr id="8" name="Footer Placeholder 7"/>
           <p:cNvSpPr>
             <a:spLocks noGrp="1"/>
           </p:cNvSpPr>
@@ -289,13 +298,7 @@
       </p:sp>
       <p:sp>
         <p:nvSpPr>
-          <p:cNvPr id="6" name="Slide Number Placeholder 5">
-            <a:extLst>
-              <a:ext uri="{FF2B5EF4-FFF2-40B4-BE49-F238E27FC236}">
-                <a16:creationId xmlns:a16="http://schemas.microsoft.com/office/drawing/2014/main" id="{80E9416E-91C7-5BEE-85C9-4BC53C7C7B93}"/>
-              </a:ext>
-            </a:extLst>
-          </p:cNvPr>
+          <p:cNvPr id="9" name="Slide Number Placeholder 8"/>
           <p:cNvSpPr>
             <a:spLocks noGrp="1"/>
           </p:cNvSpPr>
@@ -319,12 +322,12 @@
     </p:spTree>
     <p:extLst>
       <p:ext uri="{BB962C8B-B14F-4D97-AF65-F5344CB8AC3E}">
-        <p14:creationId xmlns:p14="http://schemas.microsoft.com/office/powerpoint/2010/main" val="1233100804"/>
+        <p14:creationId xmlns:p14="http://schemas.microsoft.com/office/powerpoint/2010/main" val="294319108"/>
       </p:ext>
     </p:extLst>
   </p:cSld>
   <p:clrMapOvr>
-    <a:masterClrMapping/>
+    <a:overrideClrMapping bg1="dk1" tx1="lt1" bg2="dk2" tx2="lt2" accent1="accent1" accent2="accent2" accent3="accent3" accent4="accent4" accent5="accent5" accent6="accent6" hlink="hlink" folHlink="folHlink"/>
   </p:clrMapOvr>
 </p:sldLayout>
 </file>
@@ -348,13 +351,7 @@
       </p:grpSpPr>
       <p:sp>
         <p:nvSpPr>
-          <p:cNvPr id="2" name="Title 1">
-            <a:extLst>
-              <a:ext uri="{FF2B5EF4-FFF2-40B4-BE49-F238E27FC236}">
-                <a16:creationId xmlns:a16="http://schemas.microsoft.com/office/drawing/2014/main" id="{ADFD8541-3688-5BC9-EE96-B3F969CA29EF}"/>
-              </a:ext>
-            </a:extLst>
-          </p:cNvPr>
+          <p:cNvPr id="2" name="Title 1"/>
           <p:cNvSpPr>
             <a:spLocks noGrp="1"/>
           </p:cNvSpPr>
@@ -371,19 +368,13 @@
               <a:rPr lang="en-US"/>
               <a:t>Click to edit Master title style</a:t>
             </a:r>
-            <a:endParaRPr lang="en-TH"/>
-          </a:p>
-        </p:txBody>
-      </p:sp>
-      <p:sp>
-        <p:nvSpPr>
-          <p:cNvPr id="3" name="Vertical Text Placeholder 2">
-            <a:extLst>
-              <a:ext uri="{FF2B5EF4-FFF2-40B4-BE49-F238E27FC236}">
-                <a16:creationId xmlns:a16="http://schemas.microsoft.com/office/drawing/2014/main" id="{13244132-BF02-6186-9884-31B3CB3B843F}"/>
-              </a:ext>
-            </a:extLst>
-          </p:cNvPr>
+            <a:endParaRPr lang="en-US" dirty="0"/>
+          </a:p>
+        </p:txBody>
+      </p:sp>
+      <p:sp>
+        <p:nvSpPr>
+          <p:cNvPr id="3" name="Vertical Text Placeholder 2"/>
           <p:cNvSpPr>
             <a:spLocks noGrp="1"/>
           </p:cNvSpPr>
@@ -429,19 +420,13 @@
               <a:rPr lang="en-US"/>
               <a:t>Fifth level</a:t>
             </a:r>
-            <a:endParaRPr lang="en-TH"/>
-          </a:p>
-        </p:txBody>
-      </p:sp>
-      <p:sp>
-        <p:nvSpPr>
-          <p:cNvPr id="4" name="Date Placeholder 3">
-            <a:extLst>
-              <a:ext uri="{FF2B5EF4-FFF2-40B4-BE49-F238E27FC236}">
-                <a16:creationId xmlns:a16="http://schemas.microsoft.com/office/drawing/2014/main" id="{CA9745DD-B471-CB73-18DD-27F04993B39D}"/>
-              </a:ext>
-            </a:extLst>
-          </p:cNvPr>
+            <a:endParaRPr lang="en-US" dirty="0"/>
+          </a:p>
+        </p:txBody>
+      </p:sp>
+      <p:sp>
+        <p:nvSpPr>
+          <p:cNvPr id="4" name="Date Placeholder 3"/>
           <p:cNvSpPr>
             <a:spLocks noGrp="1"/>
           </p:cNvSpPr>
@@ -464,13 +449,7 @@
       </p:sp>
       <p:sp>
         <p:nvSpPr>
-          <p:cNvPr id="5" name="Footer Placeholder 4">
-            <a:extLst>
-              <a:ext uri="{FF2B5EF4-FFF2-40B4-BE49-F238E27FC236}">
-                <a16:creationId xmlns:a16="http://schemas.microsoft.com/office/drawing/2014/main" id="{BACF1223-8966-B985-C7A5-76F393B06C91}"/>
-              </a:ext>
-            </a:extLst>
-          </p:cNvPr>
+          <p:cNvPr id="5" name="Footer Placeholder 4"/>
           <p:cNvSpPr>
             <a:spLocks noGrp="1"/>
           </p:cNvSpPr>
@@ -489,13 +468,7 @@
       </p:sp>
       <p:sp>
         <p:nvSpPr>
-          <p:cNvPr id="6" name="Slide Number Placeholder 5">
-            <a:extLst>
-              <a:ext uri="{FF2B5EF4-FFF2-40B4-BE49-F238E27FC236}">
-                <a16:creationId xmlns:a16="http://schemas.microsoft.com/office/drawing/2014/main" id="{D46D459A-846A-3D82-5586-9AEB3CD3B39C}"/>
-              </a:ext>
-            </a:extLst>
-          </p:cNvPr>
+          <p:cNvPr id="6" name="Slide Number Placeholder 5"/>
           <p:cNvSpPr>
             <a:spLocks noGrp="1"/>
           </p:cNvSpPr>
@@ -519,7 +492,7 @@
     </p:spTree>
     <p:extLst>
       <p:ext uri="{BB962C8B-B14F-4D97-AF65-F5344CB8AC3E}">
-        <p14:creationId xmlns:p14="http://schemas.microsoft.com/office/powerpoint/2010/main" val="4121866516"/>
+        <p14:creationId xmlns:p14="http://schemas.microsoft.com/office/powerpoint/2010/main" val="3771045091"/>
       </p:ext>
     </p:extLst>
   </p:cSld>
@@ -548,13 +521,7 @@
       </p:grpSpPr>
       <p:sp>
         <p:nvSpPr>
-          <p:cNvPr id="2" name="Vertical Title 1">
-            <a:extLst>
-              <a:ext uri="{FF2B5EF4-FFF2-40B4-BE49-F238E27FC236}">
-                <a16:creationId xmlns:a16="http://schemas.microsoft.com/office/drawing/2014/main" id="{B4509EAA-B8D8-4CEC-F979-1D60F0997FDD}"/>
-              </a:ext>
-            </a:extLst>
-          </p:cNvPr>
+          <p:cNvPr id="2" name="Vertical Title 1"/>
           <p:cNvSpPr>
             <a:spLocks noGrp="1"/>
           </p:cNvSpPr>
@@ -564,8 +531,8 @@
         </p:nvSpPr>
         <p:spPr>
           <a:xfrm>
-            <a:off x="8724900" y="365125"/>
-            <a:ext cx="2628900" cy="5811838"/>
+            <a:off x="8653112" y="937260"/>
+            <a:ext cx="1298608" cy="4983480"/>
           </a:xfrm>
         </p:spPr>
         <p:txBody>
@@ -576,19 +543,13 @@
               <a:rPr lang="en-US"/>
               <a:t>Click to edit Master title style</a:t>
             </a:r>
-            <a:endParaRPr lang="en-TH"/>
-          </a:p>
-        </p:txBody>
-      </p:sp>
-      <p:sp>
-        <p:nvSpPr>
-          <p:cNvPr id="3" name="Vertical Text Placeholder 2">
-            <a:extLst>
-              <a:ext uri="{FF2B5EF4-FFF2-40B4-BE49-F238E27FC236}">
-                <a16:creationId xmlns:a16="http://schemas.microsoft.com/office/drawing/2014/main" id="{9BCD9DCB-72BE-3FD8-4C01-D1B7CACD0D77}"/>
-              </a:ext>
-            </a:extLst>
-          </p:cNvPr>
+            <a:endParaRPr lang="en-US" dirty="0"/>
+          </a:p>
+        </p:txBody>
+      </p:sp>
+      <p:sp>
+        <p:nvSpPr>
+          <p:cNvPr id="3" name="Vertical Text Placeholder 2"/>
           <p:cNvSpPr>
             <a:spLocks noGrp="1"/>
           </p:cNvSpPr>
@@ -598,8 +559,8 @@
         </p:nvSpPr>
         <p:spPr>
           <a:xfrm>
-            <a:off x="838200" y="365125"/>
-            <a:ext cx="7734300" cy="5811838"/>
+            <a:off x="2231136" y="937260"/>
+            <a:ext cx="6198489" cy="4983480"/>
           </a:xfrm>
         </p:spPr>
         <p:txBody>
@@ -639,19 +600,13 @@
               <a:rPr lang="en-US"/>
               <a:t>Fifth level</a:t>
             </a:r>
-            <a:endParaRPr lang="en-TH"/>
-          </a:p>
-        </p:txBody>
-      </p:sp>
-      <p:sp>
-        <p:nvSpPr>
-          <p:cNvPr id="4" name="Date Placeholder 3">
-            <a:extLst>
-              <a:ext uri="{FF2B5EF4-FFF2-40B4-BE49-F238E27FC236}">
-                <a16:creationId xmlns:a16="http://schemas.microsoft.com/office/drawing/2014/main" id="{BC8FBC4E-4FCD-6CAB-8C3C-B5D38B288FEB}"/>
-              </a:ext>
-            </a:extLst>
-          </p:cNvPr>
+            <a:endParaRPr lang="en-US" dirty="0"/>
+          </a:p>
+        </p:txBody>
+      </p:sp>
+      <p:sp>
+        <p:nvSpPr>
+          <p:cNvPr id="4" name="Date Placeholder 3"/>
           <p:cNvSpPr>
             <a:spLocks noGrp="1"/>
           </p:cNvSpPr>
@@ -674,13 +629,7 @@
       </p:sp>
       <p:sp>
         <p:nvSpPr>
-          <p:cNvPr id="5" name="Footer Placeholder 4">
-            <a:extLst>
-              <a:ext uri="{FF2B5EF4-FFF2-40B4-BE49-F238E27FC236}">
-                <a16:creationId xmlns:a16="http://schemas.microsoft.com/office/drawing/2014/main" id="{5F752960-D55B-E1D8-D5C9-20641BB5B222}"/>
-              </a:ext>
-            </a:extLst>
-          </p:cNvPr>
+          <p:cNvPr id="5" name="Footer Placeholder 4"/>
           <p:cNvSpPr>
             <a:spLocks noGrp="1"/>
           </p:cNvSpPr>
@@ -699,13 +648,7 @@
       </p:sp>
       <p:sp>
         <p:nvSpPr>
-          <p:cNvPr id="6" name="Slide Number Placeholder 5">
-            <a:extLst>
-              <a:ext uri="{FF2B5EF4-FFF2-40B4-BE49-F238E27FC236}">
-                <a16:creationId xmlns:a16="http://schemas.microsoft.com/office/drawing/2014/main" id="{D80B95EA-AE01-771F-6C88-14CA553498E3}"/>
-              </a:ext>
-            </a:extLst>
-          </p:cNvPr>
+          <p:cNvPr id="6" name="Slide Number Placeholder 5"/>
           <p:cNvSpPr>
             <a:spLocks noGrp="1"/>
           </p:cNvSpPr>
@@ -729,7 +672,7 @@
     </p:spTree>
     <p:extLst>
       <p:ext uri="{BB962C8B-B14F-4D97-AF65-F5344CB8AC3E}">
-        <p14:creationId xmlns:p14="http://schemas.microsoft.com/office/powerpoint/2010/main" val="3931141845"/>
+        <p14:creationId xmlns:p14="http://schemas.microsoft.com/office/powerpoint/2010/main" val="1340405941"/>
       </p:ext>
     </p:extLst>
   </p:cSld>
@@ -758,13 +701,7 @@
       </p:grpSpPr>
       <p:sp>
         <p:nvSpPr>
-          <p:cNvPr id="2" name="Title 1">
-            <a:extLst>
-              <a:ext uri="{FF2B5EF4-FFF2-40B4-BE49-F238E27FC236}">
-                <a16:creationId xmlns:a16="http://schemas.microsoft.com/office/drawing/2014/main" id="{3ACD4E08-20E9-2851-AB96-D459E4A4B0C0}"/>
-              </a:ext>
-            </a:extLst>
-          </p:cNvPr>
+          <p:cNvPr id="2" name="Title 1"/>
           <p:cNvSpPr>
             <a:spLocks noGrp="1"/>
           </p:cNvSpPr>
@@ -781,19 +718,13 @@
               <a:rPr lang="en-US"/>
               <a:t>Click to edit Master title style</a:t>
             </a:r>
-            <a:endParaRPr lang="en-TH"/>
-          </a:p>
-        </p:txBody>
-      </p:sp>
-      <p:sp>
-        <p:nvSpPr>
-          <p:cNvPr id="3" name="Content Placeholder 2">
-            <a:extLst>
-              <a:ext uri="{FF2B5EF4-FFF2-40B4-BE49-F238E27FC236}">
-                <a16:creationId xmlns:a16="http://schemas.microsoft.com/office/drawing/2014/main" id="{D6DBFC6A-2E09-4A31-EA1B-3B527AA4C326}"/>
-              </a:ext>
-            </a:extLst>
-          </p:cNvPr>
+            <a:endParaRPr lang="en-US" dirty="0"/>
+          </a:p>
+        </p:txBody>
+      </p:sp>
+      <p:sp>
+        <p:nvSpPr>
+          <p:cNvPr id="3" name="Content Placeholder 2"/>
           <p:cNvSpPr>
             <a:spLocks noGrp="1"/>
           </p:cNvSpPr>
@@ -839,19 +770,13 @@
               <a:rPr lang="en-US"/>
               <a:t>Fifth level</a:t>
             </a:r>
-            <a:endParaRPr lang="en-TH"/>
-          </a:p>
-        </p:txBody>
-      </p:sp>
-      <p:sp>
-        <p:nvSpPr>
-          <p:cNvPr id="4" name="Date Placeholder 3">
-            <a:extLst>
-              <a:ext uri="{FF2B5EF4-FFF2-40B4-BE49-F238E27FC236}">
-                <a16:creationId xmlns:a16="http://schemas.microsoft.com/office/drawing/2014/main" id="{B75CCEFD-615F-6BAF-66D8-3410BF89E31A}"/>
-              </a:ext>
-            </a:extLst>
-          </p:cNvPr>
+            <a:endParaRPr lang="en-US" dirty="0"/>
+          </a:p>
+        </p:txBody>
+      </p:sp>
+      <p:sp>
+        <p:nvSpPr>
+          <p:cNvPr id="7" name="Date Placeholder 6"/>
           <p:cNvSpPr>
             <a:spLocks noGrp="1"/>
           </p:cNvSpPr>
@@ -874,13 +799,7 @@
       </p:sp>
       <p:sp>
         <p:nvSpPr>
-          <p:cNvPr id="5" name="Footer Placeholder 4">
-            <a:extLst>
-              <a:ext uri="{FF2B5EF4-FFF2-40B4-BE49-F238E27FC236}">
-                <a16:creationId xmlns:a16="http://schemas.microsoft.com/office/drawing/2014/main" id="{9497036E-53F2-CB24-BC93-C0282B2FBEE9}"/>
-              </a:ext>
-            </a:extLst>
-          </p:cNvPr>
+          <p:cNvPr id="8" name="Footer Placeholder 7"/>
           <p:cNvSpPr>
             <a:spLocks noGrp="1"/>
           </p:cNvSpPr>
@@ -899,13 +818,7 @@
       </p:sp>
       <p:sp>
         <p:nvSpPr>
-          <p:cNvPr id="6" name="Slide Number Placeholder 5">
-            <a:extLst>
-              <a:ext uri="{FF2B5EF4-FFF2-40B4-BE49-F238E27FC236}">
-                <a16:creationId xmlns:a16="http://schemas.microsoft.com/office/drawing/2014/main" id="{F08B4AC4-18D4-6607-F976-2FD0D8C41D6C}"/>
-              </a:ext>
-            </a:extLst>
-          </p:cNvPr>
+          <p:cNvPr id="9" name="Slide Number Placeholder 8"/>
           <p:cNvSpPr>
             <a:spLocks noGrp="1"/>
           </p:cNvSpPr>
@@ -929,7 +842,7 @@
     </p:spTree>
     <p:extLst>
       <p:ext uri="{BB962C8B-B14F-4D97-AF65-F5344CB8AC3E}">
-        <p14:creationId xmlns:p14="http://schemas.microsoft.com/office/powerpoint/2010/main" val="3313666144"/>
+        <p14:creationId xmlns:p14="http://schemas.microsoft.com/office/powerpoint/2010/main" val="1921656627"/>
       </p:ext>
     </p:extLst>
   </p:cSld>
@@ -942,6 +855,14 @@
 <file path=ppt/slideLayouts/slideLayout3.xml><?xml version="1.0" encoding="utf-8"?>
 <p:sldLayout xmlns:a="http://schemas.openxmlformats.org/drawingml/2006/main" xmlns:r="http://schemas.openxmlformats.org/officeDocument/2006/relationships" xmlns:p="http://schemas.openxmlformats.org/presentationml/2006/main" type="secHead" preserve="1">
   <p:cSld name="Section Header">
+    <p:bg>
+      <p:bgPr>
+        <a:solidFill>
+          <a:schemeClr val="accent1"/>
+        </a:solidFill>
+        <a:effectLst/>
+      </p:bgPr>
+    </p:bg>
     <p:spTree>
       <p:nvGrpSpPr>
         <p:cNvPr id="1" name=""/>
@@ -958,74 +879,76 @@
       </p:grpSpPr>
       <p:sp>
         <p:nvSpPr>
-          <p:cNvPr id="2" name="Title 1">
-            <a:extLst>
-              <a:ext uri="{FF2B5EF4-FFF2-40B4-BE49-F238E27FC236}">
-                <a16:creationId xmlns:a16="http://schemas.microsoft.com/office/drawing/2014/main" id="{EE9B3B44-B577-5B13-D912-269CF9BA4877}"/>
-              </a:ext>
-            </a:extLst>
-          </p:cNvPr>
+          <p:cNvPr id="2" name="Title 1"/>
           <p:cNvSpPr>
             <a:spLocks noGrp="1"/>
           </p:cNvSpPr>
           <p:nvPr>
             <p:ph type="title"/>
+          </p:nvPr>
+        </p:nvSpPr>
+        <p:spPr bwMode="blackWhite">
+          <a:xfrm>
+            <a:off x="1600200" y="2386744"/>
+            <a:ext cx="8991600" cy="1645920"/>
+          </a:xfrm>
+          <a:solidFill>
+            <a:srgbClr val="FFFFFF"/>
+          </a:solidFill>
+          <a:ln w="38100">
+            <a:solidFill>
+              <a:srgbClr val="404040"/>
+            </a:solidFill>
+          </a:ln>
+        </p:spPr>
+        <p:txBody>
+          <a:bodyPr lIns="274320" rIns="274320" anchor="ctr" anchorCtr="1">
+            <a:normAutofit/>
+          </a:bodyPr>
+          <a:lstStyle>
+            <a:lvl1pPr>
+              <a:defRPr sz="3800">
+                <a:solidFill>
+                  <a:srgbClr val="262626"/>
+                </a:solidFill>
+              </a:defRPr>
+            </a:lvl1pPr>
+          </a:lstStyle>
+          <a:p>
+            <a:r>
+              <a:rPr lang="en-US"/>
+              <a:t>Click to edit Master title style</a:t>
+            </a:r>
+            <a:endParaRPr lang="en-US" dirty="0"/>
+          </a:p>
+        </p:txBody>
+      </p:sp>
+      <p:sp>
+        <p:nvSpPr>
+          <p:cNvPr id="3" name="Text Placeholder 2"/>
+          <p:cNvSpPr>
+            <a:spLocks noGrp="1"/>
+          </p:cNvSpPr>
+          <p:nvPr>
+            <p:ph type="body" idx="1"/>
           </p:nvPr>
         </p:nvSpPr>
         <p:spPr>
           <a:xfrm>
-            <a:off x="831850" y="1709738"/>
-            <a:ext cx="10515600" cy="2852737"/>
+            <a:off x="2695194" y="4352465"/>
+            <a:ext cx="6801612" cy="1265082"/>
           </a:xfrm>
         </p:spPr>
         <p:txBody>
-          <a:bodyPr anchor="b"/>
-          <a:lstStyle>
-            <a:lvl1pPr>
-              <a:defRPr sz="6000"/>
-            </a:lvl1pPr>
-          </a:lstStyle>
-          <a:p>
-            <a:r>
-              <a:rPr lang="en-US"/>
-              <a:t>Click to edit Master title style</a:t>
-            </a:r>
-            <a:endParaRPr lang="en-TH"/>
-          </a:p>
-        </p:txBody>
-      </p:sp>
-      <p:sp>
-        <p:nvSpPr>
-          <p:cNvPr id="3" name="Text Placeholder 2">
-            <a:extLst>
-              <a:ext uri="{FF2B5EF4-FFF2-40B4-BE49-F238E27FC236}">
-                <a16:creationId xmlns:a16="http://schemas.microsoft.com/office/drawing/2014/main" id="{D99EA3B6-B17C-99AA-D34D-E375F026EE4C}"/>
-              </a:ext>
-            </a:extLst>
-          </p:cNvPr>
-          <p:cNvSpPr>
-            <a:spLocks noGrp="1"/>
-          </p:cNvSpPr>
-          <p:nvPr>
-            <p:ph type="body" idx="1"/>
-          </p:nvPr>
-        </p:nvSpPr>
-        <p:spPr>
-          <a:xfrm>
-            <a:off x="831850" y="4589463"/>
-            <a:ext cx="10515600" cy="1500187"/>
-          </a:xfrm>
-        </p:spPr>
-        <p:txBody>
-          <a:bodyPr/>
+          <a:bodyPr anchor="t" anchorCtr="1">
+            <a:normAutofit/>
+          </a:bodyPr>
           <a:lstStyle>
             <a:lvl1pPr marL="0" indent="0">
               <a:buNone/>
-              <a:defRPr sz="2400">
+              <a:defRPr sz="2000">
                 <a:solidFill>
-                  <a:schemeClr val="tx1">
-                    <a:tint val="82000"/>
-                  </a:schemeClr>
+                  <a:schemeClr val="tx1"/>
                 </a:solidFill>
               </a:defRPr>
             </a:lvl1pPr>
@@ -1034,7 +957,7 @@
               <a:defRPr sz="2000">
                 <a:solidFill>
                   <a:schemeClr val="tx1">
-                    <a:tint val="82000"/>
+                    <a:tint val="75000"/>
                   </a:schemeClr>
                 </a:solidFill>
               </a:defRPr>
@@ -1044,7 +967,7 @@
               <a:defRPr sz="1800">
                 <a:solidFill>
                   <a:schemeClr val="tx1">
-                    <a:tint val="82000"/>
+                    <a:tint val="75000"/>
                   </a:schemeClr>
                 </a:solidFill>
               </a:defRPr>
@@ -1054,7 +977,7 @@
               <a:defRPr sz="1600">
                 <a:solidFill>
                   <a:schemeClr val="tx1">
-                    <a:tint val="82000"/>
+                    <a:tint val="75000"/>
                   </a:schemeClr>
                 </a:solidFill>
               </a:defRPr>
@@ -1064,7 +987,7 @@
               <a:defRPr sz="1600">
                 <a:solidFill>
                   <a:schemeClr val="tx1">
-                    <a:tint val="82000"/>
+                    <a:tint val="75000"/>
                   </a:schemeClr>
                 </a:solidFill>
               </a:defRPr>
@@ -1074,7 +997,7 @@
               <a:defRPr sz="1600">
                 <a:solidFill>
                   <a:schemeClr val="tx1">
-                    <a:tint val="82000"/>
+                    <a:tint val="75000"/>
                   </a:schemeClr>
                 </a:solidFill>
               </a:defRPr>
@@ -1084,7 +1007,7 @@
               <a:defRPr sz="1600">
                 <a:solidFill>
                   <a:schemeClr val="tx1">
-                    <a:tint val="82000"/>
+                    <a:tint val="75000"/>
                   </a:schemeClr>
                 </a:solidFill>
               </a:defRPr>
@@ -1094,7 +1017,7 @@
               <a:defRPr sz="1600">
                 <a:solidFill>
                   <a:schemeClr val="tx1">
-                    <a:tint val="82000"/>
+                    <a:tint val="75000"/>
                   </a:schemeClr>
                 </a:solidFill>
               </a:defRPr>
@@ -1104,7 +1027,7 @@
               <a:defRPr sz="1600">
                 <a:solidFill>
                   <a:schemeClr val="tx1">
-                    <a:tint val="82000"/>
+                    <a:tint val="75000"/>
                   </a:schemeClr>
                 </a:solidFill>
               </a:defRPr>
@@ -1121,13 +1044,7 @@
       </p:sp>
       <p:sp>
         <p:nvSpPr>
-          <p:cNvPr id="4" name="Date Placeholder 3">
-            <a:extLst>
-              <a:ext uri="{FF2B5EF4-FFF2-40B4-BE49-F238E27FC236}">
-                <a16:creationId xmlns:a16="http://schemas.microsoft.com/office/drawing/2014/main" id="{163CDB70-705E-7CEF-43D3-6DE7FD734B98}"/>
-              </a:ext>
-            </a:extLst>
-          </p:cNvPr>
+          <p:cNvPr id="7" name="Date Placeholder 6"/>
           <p:cNvSpPr>
             <a:spLocks noGrp="1"/>
           </p:cNvSpPr>
@@ -1150,13 +1067,7 @@
       </p:sp>
       <p:sp>
         <p:nvSpPr>
-          <p:cNvPr id="5" name="Footer Placeholder 4">
-            <a:extLst>
-              <a:ext uri="{FF2B5EF4-FFF2-40B4-BE49-F238E27FC236}">
-                <a16:creationId xmlns:a16="http://schemas.microsoft.com/office/drawing/2014/main" id="{C3DC07B2-44DA-75EB-DCED-0247C0630847}"/>
-              </a:ext>
-            </a:extLst>
-          </p:cNvPr>
+          <p:cNvPr id="8" name="Footer Placeholder 7"/>
           <p:cNvSpPr>
             <a:spLocks noGrp="1"/>
           </p:cNvSpPr>
@@ -1175,13 +1086,7 @@
       </p:sp>
       <p:sp>
         <p:nvSpPr>
-          <p:cNvPr id="6" name="Slide Number Placeholder 5">
-            <a:extLst>
-              <a:ext uri="{FF2B5EF4-FFF2-40B4-BE49-F238E27FC236}">
-                <a16:creationId xmlns:a16="http://schemas.microsoft.com/office/drawing/2014/main" id="{E6F8D901-06E5-5E89-06F5-FF8D4F55763F}"/>
-              </a:ext>
-            </a:extLst>
-          </p:cNvPr>
+          <p:cNvPr id="9" name="Slide Number Placeholder 8"/>
           <p:cNvSpPr>
             <a:spLocks noGrp="1"/>
           </p:cNvSpPr>
@@ -1205,12 +1110,12 @@
     </p:spTree>
     <p:extLst>
       <p:ext uri="{BB962C8B-B14F-4D97-AF65-F5344CB8AC3E}">
-        <p14:creationId xmlns:p14="http://schemas.microsoft.com/office/powerpoint/2010/main" val="147782896"/>
+        <p14:creationId xmlns:p14="http://schemas.microsoft.com/office/powerpoint/2010/main" val="828951817"/>
       </p:ext>
     </p:extLst>
   </p:cSld>
   <p:clrMapOvr>
-    <a:masterClrMapping/>
+    <a:overrideClrMapping bg1="dk1" tx1="lt1" bg2="dk2" tx2="lt2" accent1="accent1" accent2="accent2" accent3="accent3" accent4="accent4" accent5="accent5" accent6="accent6" hlink="hlink" folHlink="folHlink"/>
   </p:clrMapOvr>
 </p:sldLayout>
 </file>
@@ -1234,13 +1139,7 @@
       </p:grpSpPr>
       <p:sp>
         <p:nvSpPr>
-          <p:cNvPr id="2" name="Title 1">
-            <a:extLst>
-              <a:ext uri="{FF2B5EF4-FFF2-40B4-BE49-F238E27FC236}">
-                <a16:creationId xmlns:a16="http://schemas.microsoft.com/office/drawing/2014/main" id="{BD23BFFB-8A17-C25B-07A0-29291D9F2D61}"/>
-              </a:ext>
-            </a:extLst>
-          </p:cNvPr>
+          <p:cNvPr id="2" name="Title 1"/>
           <p:cNvSpPr>
             <a:spLocks noGrp="1"/>
           </p:cNvSpPr>
@@ -1257,19 +1156,13 @@
               <a:rPr lang="en-US"/>
               <a:t>Click to edit Master title style</a:t>
             </a:r>
-            <a:endParaRPr lang="en-TH"/>
-          </a:p>
-        </p:txBody>
-      </p:sp>
-      <p:sp>
-        <p:nvSpPr>
-          <p:cNvPr id="3" name="Content Placeholder 2">
-            <a:extLst>
-              <a:ext uri="{FF2B5EF4-FFF2-40B4-BE49-F238E27FC236}">
-                <a16:creationId xmlns:a16="http://schemas.microsoft.com/office/drawing/2014/main" id="{224B03D1-5E84-9ED8-FAA7-6FD7592EB954}"/>
-              </a:ext>
-            </a:extLst>
-          </p:cNvPr>
+            <a:endParaRPr lang="en-US" dirty="0"/>
+          </a:p>
+        </p:txBody>
+      </p:sp>
+      <p:sp>
+        <p:nvSpPr>
+          <p:cNvPr id="3" name="Content Placeholder 2"/>
           <p:cNvSpPr>
             <a:spLocks noGrp="1"/>
           </p:cNvSpPr>
@@ -1279,8 +1172,8 @@
         </p:nvSpPr>
         <p:spPr>
           <a:xfrm>
-            <a:off x="838200" y="1825625"/>
-            <a:ext cx="5181600" cy="4351338"/>
+            <a:off x="1581912" y="2638044"/>
+            <a:ext cx="4271771" cy="3101982"/>
           </a:xfrm>
         </p:spPr>
         <p:txBody>
@@ -1320,19 +1213,13 @@
               <a:rPr lang="en-US"/>
               <a:t>Fifth level</a:t>
             </a:r>
-            <a:endParaRPr lang="en-TH"/>
-          </a:p>
-        </p:txBody>
-      </p:sp>
-      <p:sp>
-        <p:nvSpPr>
-          <p:cNvPr id="4" name="Content Placeholder 3">
-            <a:extLst>
-              <a:ext uri="{FF2B5EF4-FFF2-40B4-BE49-F238E27FC236}">
-                <a16:creationId xmlns:a16="http://schemas.microsoft.com/office/drawing/2014/main" id="{996BE160-E142-3313-E4EF-ED54E3794442}"/>
-              </a:ext>
-            </a:extLst>
-          </p:cNvPr>
+            <a:endParaRPr lang="en-US" dirty="0"/>
+          </a:p>
+        </p:txBody>
+      </p:sp>
+      <p:sp>
+        <p:nvSpPr>
+          <p:cNvPr id="4" name="Content Placeholder 3"/>
           <p:cNvSpPr>
             <a:spLocks noGrp="1"/>
           </p:cNvSpPr>
@@ -1342,8 +1229,8 @@
         </p:nvSpPr>
         <p:spPr>
           <a:xfrm>
-            <a:off x="6172200" y="1825625"/>
-            <a:ext cx="5181600" cy="4351338"/>
+            <a:off x="6338315" y="2638044"/>
+            <a:ext cx="4270247" cy="3101982"/>
           </a:xfrm>
         </p:spPr>
         <p:txBody>
@@ -1383,19 +1270,13 @@
               <a:rPr lang="en-US"/>
               <a:t>Fifth level</a:t>
             </a:r>
-            <a:endParaRPr lang="en-TH"/>
-          </a:p>
-        </p:txBody>
-      </p:sp>
-      <p:sp>
-        <p:nvSpPr>
-          <p:cNvPr id="5" name="Date Placeholder 4">
-            <a:extLst>
-              <a:ext uri="{FF2B5EF4-FFF2-40B4-BE49-F238E27FC236}">
-                <a16:creationId xmlns:a16="http://schemas.microsoft.com/office/drawing/2014/main" id="{93AF9EE7-EA02-E5AD-8018-2C70CAB3CD72}"/>
-              </a:ext>
-            </a:extLst>
-          </p:cNvPr>
+            <a:endParaRPr lang="en-US" dirty="0"/>
+          </a:p>
+        </p:txBody>
+      </p:sp>
+      <p:sp>
+        <p:nvSpPr>
+          <p:cNvPr id="8" name="Date Placeholder 7"/>
           <p:cNvSpPr>
             <a:spLocks noGrp="1"/>
           </p:cNvSpPr>
@@ -1418,13 +1299,7 @@
       </p:sp>
       <p:sp>
         <p:nvSpPr>
-          <p:cNvPr id="6" name="Footer Placeholder 5">
-            <a:extLst>
-              <a:ext uri="{FF2B5EF4-FFF2-40B4-BE49-F238E27FC236}">
-                <a16:creationId xmlns:a16="http://schemas.microsoft.com/office/drawing/2014/main" id="{38A492F3-DEEA-AF8C-76C2-4EE838ED2178}"/>
-              </a:ext>
-            </a:extLst>
-          </p:cNvPr>
+          <p:cNvPr id="9" name="Footer Placeholder 8"/>
           <p:cNvSpPr>
             <a:spLocks noGrp="1"/>
           </p:cNvSpPr>
@@ -1443,13 +1318,7 @@
       </p:sp>
       <p:sp>
         <p:nvSpPr>
-          <p:cNvPr id="7" name="Slide Number Placeholder 6">
-            <a:extLst>
-              <a:ext uri="{FF2B5EF4-FFF2-40B4-BE49-F238E27FC236}">
-                <a16:creationId xmlns:a16="http://schemas.microsoft.com/office/drawing/2014/main" id="{846DC7ED-6AEA-9665-561F-38A3BBE6BA71}"/>
-              </a:ext>
-            </a:extLst>
-          </p:cNvPr>
+          <p:cNvPr id="10" name="Slide Number Placeholder 9"/>
           <p:cNvSpPr>
             <a:spLocks noGrp="1"/>
           </p:cNvSpPr>
@@ -1473,7 +1342,7 @@
     </p:spTree>
     <p:extLst>
       <p:ext uri="{BB962C8B-B14F-4D97-AF65-F5344CB8AC3E}">
-        <p14:creationId xmlns:p14="http://schemas.microsoft.com/office/powerpoint/2010/main" val="2274107222"/>
+        <p14:creationId xmlns:p14="http://schemas.microsoft.com/office/powerpoint/2010/main" val="489594996"/>
       </p:ext>
     </p:extLst>
   </p:cSld>
@@ -1502,70 +1371,38 @@
       </p:grpSpPr>
       <p:sp>
         <p:nvSpPr>
-          <p:cNvPr id="2" name="Title 1">
-            <a:extLst>
-              <a:ext uri="{FF2B5EF4-FFF2-40B4-BE49-F238E27FC236}">
-                <a16:creationId xmlns:a16="http://schemas.microsoft.com/office/drawing/2014/main" id="{7F78CA30-86DF-4A92-9BEA-B825735E5B06}"/>
-              </a:ext>
-            </a:extLst>
-          </p:cNvPr>
-          <p:cNvSpPr>
-            <a:spLocks noGrp="1"/>
-          </p:cNvSpPr>
-          <p:nvPr>
-            <p:ph type="title"/>
+          <p:cNvPr id="3" name="Text Placeholder 2"/>
+          <p:cNvSpPr>
+            <a:spLocks noGrp="1"/>
+          </p:cNvSpPr>
+          <p:nvPr>
+            <p:ph type="body" idx="1"/>
           </p:nvPr>
         </p:nvSpPr>
         <p:spPr>
           <a:xfrm>
-            <a:off x="839788" y="365125"/>
-            <a:ext cx="10515600" cy="1325563"/>
+            <a:off x="1583436" y="2313433"/>
+            <a:ext cx="4270248" cy="704087"/>
           </a:xfrm>
         </p:spPr>
         <p:txBody>
-          <a:bodyPr/>
-          <a:lstStyle/>
-          <a:p>
-            <a:r>
-              <a:rPr lang="en-US"/>
-              <a:t>Click to edit Master title style</a:t>
-            </a:r>
-            <a:endParaRPr lang="en-TH"/>
-          </a:p>
-        </p:txBody>
-      </p:sp>
-      <p:sp>
-        <p:nvSpPr>
-          <p:cNvPr id="3" name="Text Placeholder 2">
-            <a:extLst>
-              <a:ext uri="{FF2B5EF4-FFF2-40B4-BE49-F238E27FC236}">
-                <a16:creationId xmlns:a16="http://schemas.microsoft.com/office/drawing/2014/main" id="{4FB6EC39-4243-63CA-7854-83FEA531F8D9}"/>
-              </a:ext>
-            </a:extLst>
-          </p:cNvPr>
-          <p:cNvSpPr>
-            <a:spLocks noGrp="1"/>
-          </p:cNvSpPr>
-          <p:nvPr>
-            <p:ph type="body" idx="1"/>
-          </p:nvPr>
-        </p:nvSpPr>
-        <p:spPr>
-          <a:xfrm>
-            <a:off x="839788" y="1681163"/>
-            <a:ext cx="5157787" cy="823912"/>
-          </a:xfrm>
-        </p:spPr>
-        <p:txBody>
-          <a:bodyPr anchor="b"/>
+          <a:bodyPr anchor="b" anchorCtr="1">
+            <a:normAutofit/>
+          </a:bodyPr>
           <a:lstStyle>
-            <a:lvl1pPr marL="0" indent="0">
-              <a:buNone/>
-              <a:defRPr sz="2400" b="1"/>
+            <a:lvl1pPr marL="0" indent="0" algn="ctr">
+              <a:buNone/>
+              <a:defRPr sz="1900" b="0" cap="all" spc="100" baseline="0">
+                <a:solidFill>
+                  <a:schemeClr val="accent2">
+                    <a:lumMod val="75000"/>
+                  </a:schemeClr>
+                </a:solidFill>
+              </a:defRPr>
             </a:lvl1pPr>
             <a:lvl2pPr marL="457200" indent="0">
               <a:buNone/>
-              <a:defRPr sz="2000" b="1"/>
+              <a:defRPr sz="1900" b="1"/>
             </a:lvl2pPr>
             <a:lvl3pPr marL="914400" indent="0">
               <a:buNone/>
@@ -1607,13 +1444,7 @@
       </p:sp>
       <p:sp>
         <p:nvSpPr>
-          <p:cNvPr id="4" name="Content Placeholder 3">
-            <a:extLst>
-              <a:ext uri="{FF2B5EF4-FFF2-40B4-BE49-F238E27FC236}">
-                <a16:creationId xmlns:a16="http://schemas.microsoft.com/office/drawing/2014/main" id="{FE04D673-E4E6-1405-3CF1-9BE45C930DCD}"/>
-              </a:ext>
-            </a:extLst>
-          </p:cNvPr>
+          <p:cNvPr id="4" name="Content Placeholder 3"/>
           <p:cNvSpPr>
             <a:spLocks noGrp="1"/>
           </p:cNvSpPr>
@@ -1623,8 +1454,8 @@
         </p:nvSpPr>
         <p:spPr>
           <a:xfrm>
-            <a:off x="839788" y="2505075"/>
-            <a:ext cx="5157787" cy="3684588"/>
+            <a:off x="1583436" y="3143250"/>
+            <a:ext cx="4270248" cy="2596776"/>
           </a:xfrm>
         </p:spPr>
         <p:txBody>
@@ -1664,42 +1495,105 @@
               <a:rPr lang="en-US"/>
               <a:t>Fifth level</a:t>
             </a:r>
-            <a:endParaRPr lang="en-TH"/>
-          </a:p>
-        </p:txBody>
-      </p:sp>
-      <p:sp>
-        <p:nvSpPr>
-          <p:cNvPr id="5" name="Text Placeholder 4">
-            <a:extLst>
-              <a:ext uri="{FF2B5EF4-FFF2-40B4-BE49-F238E27FC236}">
-                <a16:creationId xmlns:a16="http://schemas.microsoft.com/office/drawing/2014/main" id="{5C2F0529-E9C1-9226-EEA3-5C37ACD03252}"/>
-              </a:ext>
-            </a:extLst>
-          </p:cNvPr>
-          <p:cNvSpPr>
-            <a:spLocks noGrp="1"/>
-          </p:cNvSpPr>
-          <p:nvPr>
-            <p:ph type="body" sz="quarter" idx="3"/>
+            <a:endParaRPr lang="en-US" dirty="0"/>
+          </a:p>
+        </p:txBody>
+      </p:sp>
+      <p:sp>
+        <p:nvSpPr>
+          <p:cNvPr id="6" name="Content Placeholder 5"/>
+          <p:cNvSpPr>
+            <a:spLocks noGrp="1"/>
+          </p:cNvSpPr>
+          <p:nvPr>
+            <p:ph sz="quarter" idx="4"/>
           </p:nvPr>
         </p:nvSpPr>
         <p:spPr>
           <a:xfrm>
-            <a:off x="6172200" y="1681163"/>
-            <a:ext cx="5183188" cy="823912"/>
+            <a:off x="6338316" y="3143250"/>
+            <a:ext cx="4253484" cy="2596776"/>
           </a:xfrm>
         </p:spPr>
         <p:txBody>
-          <a:bodyPr anchor="b"/>
+          <a:bodyPr/>
           <a:lstStyle>
-            <a:lvl1pPr marL="0" indent="0">
-              <a:buNone/>
-              <a:defRPr sz="2400" b="1"/>
+            <a:lvl5pPr>
+              <a:defRPr/>
+            </a:lvl5pPr>
+          </a:lstStyle>
+          <a:p>
+            <a:pPr lvl="0"/>
+            <a:r>
+              <a:rPr lang="en-US"/>
+              <a:t>Click to edit Master text styles</a:t>
+            </a:r>
+          </a:p>
+          <a:p>
+            <a:pPr lvl="1"/>
+            <a:r>
+              <a:rPr lang="en-US"/>
+              <a:t>Second level</a:t>
+            </a:r>
+          </a:p>
+          <a:p>
+            <a:pPr lvl="2"/>
+            <a:r>
+              <a:rPr lang="en-US"/>
+              <a:t>Third level</a:t>
+            </a:r>
+          </a:p>
+          <a:p>
+            <a:pPr lvl="3"/>
+            <a:r>
+              <a:rPr lang="en-US"/>
+              <a:t>Fourth level</a:t>
+            </a:r>
+          </a:p>
+          <a:p>
+            <a:pPr lvl="4"/>
+            <a:r>
+              <a:rPr lang="en-US"/>
+              <a:t>Fifth level</a:t>
+            </a:r>
+            <a:endParaRPr lang="en-US" dirty="0"/>
+          </a:p>
+        </p:txBody>
+      </p:sp>
+      <p:sp>
+        <p:nvSpPr>
+          <p:cNvPr id="11" name="Text Placeholder 4"/>
+          <p:cNvSpPr>
+            <a:spLocks noGrp="1"/>
+          </p:cNvSpPr>
+          <p:nvPr>
+            <p:ph type="body" sz="quarter" idx="13"/>
+          </p:nvPr>
+        </p:nvSpPr>
+        <p:spPr>
+          <a:xfrm>
+            <a:off x="6338316" y="2313433"/>
+            <a:ext cx="4270248" cy="704087"/>
+          </a:xfrm>
+        </p:spPr>
+        <p:txBody>
+          <a:bodyPr anchor="b" anchorCtr="1">
+            <a:normAutofit/>
+          </a:bodyPr>
+          <a:lstStyle>
+            <a:lvl1pPr marL="0" indent="0" algn="ctr">
+              <a:buNone/>
+              <a:defRPr sz="1900" b="0" cap="all" spc="100" baseline="0">
+                <a:solidFill>
+                  <a:schemeClr val="accent2">
+                    <a:lumMod val="75000"/>
+                  </a:schemeClr>
+                </a:solidFill>
+              </a:defRPr>
             </a:lvl1pPr>
             <a:lvl2pPr marL="457200" indent="0">
               <a:buNone/>
-              <a:defRPr sz="2000" b="1"/>
+              <a:defRPr sz="1900" b="1"/>
             </a:lvl2pPr>
             <a:lvl3pPr marL="914400" indent="0">
               <a:buNone/>
@@ -1741,76 +1635,7 @@
       </p:sp>
       <p:sp>
         <p:nvSpPr>
-          <p:cNvPr id="6" name="Content Placeholder 5">
-            <a:extLst>
-              <a:ext uri="{FF2B5EF4-FFF2-40B4-BE49-F238E27FC236}">
-                <a16:creationId xmlns:a16="http://schemas.microsoft.com/office/drawing/2014/main" id="{889CBE30-D585-5382-5F7D-DCC9387B8A4F}"/>
-              </a:ext>
-            </a:extLst>
-          </p:cNvPr>
-          <p:cNvSpPr>
-            <a:spLocks noGrp="1"/>
-          </p:cNvSpPr>
-          <p:nvPr>
-            <p:ph sz="quarter" idx="4"/>
-          </p:nvPr>
-        </p:nvSpPr>
-        <p:spPr>
-          <a:xfrm>
-            <a:off x="6172200" y="2505075"/>
-            <a:ext cx="5183188" cy="3684588"/>
-          </a:xfrm>
-        </p:spPr>
-        <p:txBody>
-          <a:bodyPr/>
-          <a:lstStyle/>
-          <a:p>
-            <a:pPr lvl="0"/>
-            <a:r>
-              <a:rPr lang="en-US"/>
-              <a:t>Click to edit Master text styles</a:t>
-            </a:r>
-          </a:p>
-          <a:p>
-            <a:pPr lvl="1"/>
-            <a:r>
-              <a:rPr lang="en-US"/>
-              <a:t>Second level</a:t>
-            </a:r>
-          </a:p>
-          <a:p>
-            <a:pPr lvl="2"/>
-            <a:r>
-              <a:rPr lang="en-US"/>
-              <a:t>Third level</a:t>
-            </a:r>
-          </a:p>
-          <a:p>
-            <a:pPr lvl="3"/>
-            <a:r>
-              <a:rPr lang="en-US"/>
-              <a:t>Fourth level</a:t>
-            </a:r>
-          </a:p>
-          <a:p>
-            <a:pPr lvl="4"/>
-            <a:r>
-              <a:rPr lang="en-US"/>
-              <a:t>Fifth level</a:t>
-            </a:r>
-            <a:endParaRPr lang="en-TH"/>
-          </a:p>
-        </p:txBody>
-      </p:sp>
-      <p:sp>
-        <p:nvSpPr>
-          <p:cNvPr id="7" name="Date Placeholder 6">
-            <a:extLst>
-              <a:ext uri="{FF2B5EF4-FFF2-40B4-BE49-F238E27FC236}">
-                <a16:creationId xmlns:a16="http://schemas.microsoft.com/office/drawing/2014/main" id="{207E5727-C5EB-7F8F-897E-270A0416E222}"/>
-              </a:ext>
-            </a:extLst>
-          </p:cNvPr>
+          <p:cNvPr id="7" name="Date Placeholder 6"/>
           <p:cNvSpPr>
             <a:spLocks noGrp="1"/>
           </p:cNvSpPr>
@@ -1833,13 +1658,7 @@
       </p:sp>
       <p:sp>
         <p:nvSpPr>
-          <p:cNvPr id="8" name="Footer Placeholder 7">
-            <a:extLst>
-              <a:ext uri="{FF2B5EF4-FFF2-40B4-BE49-F238E27FC236}">
-                <a16:creationId xmlns:a16="http://schemas.microsoft.com/office/drawing/2014/main" id="{BE63A355-8EA0-388A-330F-56C7A752E25C}"/>
-              </a:ext>
-            </a:extLst>
-          </p:cNvPr>
+          <p:cNvPr id="8" name="Footer Placeholder 7"/>
           <p:cNvSpPr>
             <a:spLocks noGrp="1"/>
           </p:cNvSpPr>
@@ -1858,13 +1677,7 @@
       </p:sp>
       <p:sp>
         <p:nvSpPr>
-          <p:cNvPr id="9" name="Slide Number Placeholder 8">
-            <a:extLst>
-              <a:ext uri="{FF2B5EF4-FFF2-40B4-BE49-F238E27FC236}">
-                <a16:creationId xmlns:a16="http://schemas.microsoft.com/office/drawing/2014/main" id="{5FAD9D63-6532-C29E-AF13-1FF18A1E34D1}"/>
-              </a:ext>
-            </a:extLst>
-          </p:cNvPr>
+          <p:cNvPr id="9" name="Slide Number Placeholder 8"/>
           <p:cNvSpPr>
             <a:spLocks noGrp="1"/>
           </p:cNvSpPr>
@@ -1885,10 +1698,33 @@
           </a:p>
         </p:txBody>
       </p:sp>
+      <p:sp>
+        <p:nvSpPr>
+          <p:cNvPr id="10" name="Title 9"/>
+          <p:cNvSpPr>
+            <a:spLocks noGrp="1"/>
+          </p:cNvSpPr>
+          <p:nvPr>
+            <p:ph type="title"/>
+          </p:nvPr>
+        </p:nvSpPr>
+        <p:spPr/>
+        <p:txBody>
+          <a:bodyPr/>
+          <a:lstStyle/>
+          <a:p>
+            <a:r>
+              <a:rPr lang="en-US"/>
+              <a:t>Click to edit Master title style</a:t>
+            </a:r>
+            <a:endParaRPr lang="en-US" dirty="0"/>
+          </a:p>
+        </p:txBody>
+      </p:sp>
     </p:spTree>
     <p:extLst>
       <p:ext uri="{BB962C8B-B14F-4D97-AF65-F5344CB8AC3E}">
-        <p14:creationId xmlns:p14="http://schemas.microsoft.com/office/powerpoint/2010/main" val="1068551970"/>
+        <p14:creationId xmlns:p14="http://schemas.microsoft.com/office/powerpoint/2010/main" val="4223104396"/>
       </p:ext>
     </p:extLst>
   </p:cSld>
@@ -1917,13 +1753,7 @@
       </p:grpSpPr>
       <p:sp>
         <p:nvSpPr>
-          <p:cNvPr id="2" name="Title 1">
-            <a:extLst>
-              <a:ext uri="{FF2B5EF4-FFF2-40B4-BE49-F238E27FC236}">
-                <a16:creationId xmlns:a16="http://schemas.microsoft.com/office/drawing/2014/main" id="{7A7A474E-3341-6CA7-6567-5449D17C7353}"/>
-              </a:ext>
-            </a:extLst>
-          </p:cNvPr>
+          <p:cNvPr id="2" name="Title 1"/>
           <p:cNvSpPr>
             <a:spLocks noGrp="1"/>
           </p:cNvSpPr>
@@ -1940,19 +1770,13 @@
               <a:rPr lang="en-US"/>
               <a:t>Click to edit Master title style</a:t>
             </a:r>
-            <a:endParaRPr lang="en-TH"/>
-          </a:p>
-        </p:txBody>
-      </p:sp>
-      <p:sp>
-        <p:nvSpPr>
-          <p:cNvPr id="3" name="Date Placeholder 2">
-            <a:extLst>
-              <a:ext uri="{FF2B5EF4-FFF2-40B4-BE49-F238E27FC236}">
-                <a16:creationId xmlns:a16="http://schemas.microsoft.com/office/drawing/2014/main" id="{6AA7EA54-2FEA-1FAB-3414-102DCF22298F}"/>
-              </a:ext>
-            </a:extLst>
-          </p:cNvPr>
+            <a:endParaRPr lang="en-US" dirty="0"/>
+          </a:p>
+        </p:txBody>
+      </p:sp>
+      <p:sp>
+        <p:nvSpPr>
+          <p:cNvPr id="3" name="Date Placeholder 2"/>
           <p:cNvSpPr>
             <a:spLocks noGrp="1"/>
           </p:cNvSpPr>
@@ -1975,13 +1799,7 @@
       </p:sp>
       <p:sp>
         <p:nvSpPr>
-          <p:cNvPr id="4" name="Footer Placeholder 3">
-            <a:extLst>
-              <a:ext uri="{FF2B5EF4-FFF2-40B4-BE49-F238E27FC236}">
-                <a16:creationId xmlns:a16="http://schemas.microsoft.com/office/drawing/2014/main" id="{B73DF3D5-2573-36F8-2701-5D6175626A61}"/>
-              </a:ext>
-            </a:extLst>
-          </p:cNvPr>
+          <p:cNvPr id="4" name="Footer Placeholder 3"/>
           <p:cNvSpPr>
             <a:spLocks noGrp="1"/>
           </p:cNvSpPr>
@@ -2000,13 +1818,7 @@
       </p:sp>
       <p:sp>
         <p:nvSpPr>
-          <p:cNvPr id="5" name="Slide Number Placeholder 4">
-            <a:extLst>
-              <a:ext uri="{FF2B5EF4-FFF2-40B4-BE49-F238E27FC236}">
-                <a16:creationId xmlns:a16="http://schemas.microsoft.com/office/drawing/2014/main" id="{FF0FA830-4AFE-E00B-E297-ACE5B8F5BDF4}"/>
-              </a:ext>
-            </a:extLst>
-          </p:cNvPr>
+          <p:cNvPr id="5" name="Slide Number Placeholder 4"/>
           <p:cNvSpPr>
             <a:spLocks noGrp="1"/>
           </p:cNvSpPr>
@@ -2030,7 +1842,7 @@
     </p:spTree>
     <p:extLst>
       <p:ext uri="{BB962C8B-B14F-4D97-AF65-F5344CB8AC3E}">
-        <p14:creationId xmlns:p14="http://schemas.microsoft.com/office/powerpoint/2010/main" val="847629035"/>
+        <p14:creationId xmlns:p14="http://schemas.microsoft.com/office/powerpoint/2010/main" val="3245985032"/>
       </p:ext>
     </p:extLst>
   </p:cSld>
@@ -2059,13 +1871,7 @@
       </p:grpSpPr>
       <p:sp>
         <p:nvSpPr>
-          <p:cNvPr id="2" name="Date Placeholder 1">
-            <a:extLst>
-              <a:ext uri="{FF2B5EF4-FFF2-40B4-BE49-F238E27FC236}">
-                <a16:creationId xmlns:a16="http://schemas.microsoft.com/office/drawing/2014/main" id="{AD30FE28-53C3-3321-2B50-8EB1950736CD}"/>
-              </a:ext>
-            </a:extLst>
-          </p:cNvPr>
+          <p:cNvPr id="2" name="Date Placeholder 1"/>
           <p:cNvSpPr>
             <a:spLocks noGrp="1"/>
           </p:cNvSpPr>
@@ -2088,13 +1894,7 @@
       </p:sp>
       <p:sp>
         <p:nvSpPr>
-          <p:cNvPr id="3" name="Footer Placeholder 2">
-            <a:extLst>
-              <a:ext uri="{FF2B5EF4-FFF2-40B4-BE49-F238E27FC236}">
-                <a16:creationId xmlns:a16="http://schemas.microsoft.com/office/drawing/2014/main" id="{2BF7165D-0667-A8D3-8C9C-3CB884B9A30F}"/>
-              </a:ext>
-            </a:extLst>
-          </p:cNvPr>
+          <p:cNvPr id="3" name="Footer Placeholder 2"/>
           <p:cNvSpPr>
             <a:spLocks noGrp="1"/>
           </p:cNvSpPr>
@@ -2113,13 +1913,7 @@
       </p:sp>
       <p:sp>
         <p:nvSpPr>
-          <p:cNvPr id="4" name="Slide Number Placeholder 3">
-            <a:extLst>
-              <a:ext uri="{FF2B5EF4-FFF2-40B4-BE49-F238E27FC236}">
-                <a16:creationId xmlns:a16="http://schemas.microsoft.com/office/drawing/2014/main" id="{5A552181-CDAC-1C46-00EF-2314A4753A6B}"/>
-              </a:ext>
-            </a:extLst>
-          </p:cNvPr>
+          <p:cNvPr id="4" name="Slide Number Placeholder 3"/>
           <p:cNvSpPr>
             <a:spLocks noGrp="1"/>
           </p:cNvSpPr>
@@ -2143,7 +1937,7 @@
     </p:spTree>
     <p:extLst>
       <p:ext uri="{BB962C8B-B14F-4D97-AF65-F5344CB8AC3E}">
-        <p14:creationId xmlns:p14="http://schemas.microsoft.com/office/powerpoint/2010/main" val="965704229"/>
+        <p14:creationId xmlns:p14="http://schemas.microsoft.com/office/powerpoint/2010/main" val="3437640002"/>
       </p:ext>
     </p:extLst>
   </p:cSld>
@@ -2172,161 +1966,223 @@
       </p:grpSpPr>
       <p:sp>
         <p:nvSpPr>
-          <p:cNvPr id="2" name="Title 1">
-            <a:extLst>
-              <a:ext uri="{FF2B5EF4-FFF2-40B4-BE49-F238E27FC236}">
-                <a16:creationId xmlns:a16="http://schemas.microsoft.com/office/drawing/2014/main" id="{D59E0CF1-8D5B-C99A-9540-035BE1CB09F0}"/>
-              </a:ext>
-            </a:extLst>
-          </p:cNvPr>
-          <p:cNvSpPr>
-            <a:spLocks noGrp="1"/>
-          </p:cNvSpPr>
-          <p:nvPr>
-            <p:ph type="title"/>
-          </p:nvPr>
+          <p:cNvPr id="26" name="Rectangle 25"/>
+          <p:cNvSpPr/>
+          <p:nvPr/>
         </p:nvSpPr>
         <p:spPr>
           <a:xfrm>
-            <a:off x="839788" y="457200"/>
-            <a:ext cx="3932237" cy="1600200"/>
+            <a:off x="0" y="0"/>
+            <a:ext cx="6096000" cy="6858000"/>
+          </a:xfrm>
+          <a:prstGeom prst="rect">
+            <a:avLst/>
+          </a:prstGeom>
+          <a:solidFill>
+            <a:schemeClr val="accent2"/>
+          </a:solidFill>
+          <a:ln>
+            <a:noFill/>
+          </a:ln>
+        </p:spPr>
+        <p:style>
+          <a:lnRef idx="2">
+            <a:schemeClr val="accent1">
+              <a:shade val="50000"/>
+            </a:schemeClr>
+          </a:lnRef>
+          <a:fillRef idx="1">
+            <a:schemeClr val="accent1"/>
+          </a:fillRef>
+          <a:effectRef idx="0">
+            <a:schemeClr val="accent1"/>
+          </a:effectRef>
+          <a:fontRef idx="minor">
+            <a:schemeClr val="lt1"/>
+          </a:fontRef>
+        </p:style>
+      </p:sp>
+      <p:sp>
+        <p:nvSpPr>
+          <p:cNvPr id="2" name="Title 1"/>
+          <p:cNvSpPr>
+            <a:spLocks noGrp="1"/>
+          </p:cNvSpPr>
+          <p:nvPr>
+            <p:ph type="title"/>
+          </p:nvPr>
+        </p:nvSpPr>
+        <p:spPr bwMode="blackWhite">
+          <a:xfrm>
+            <a:off x="804672" y="2243828"/>
+            <a:ext cx="4486656" cy="1141497"/>
+          </a:xfrm>
+          <a:solidFill>
+            <a:srgbClr val="FFFFFF"/>
+          </a:solidFill>
+          <a:ln>
+            <a:solidFill>
+              <a:srgbClr val="404040"/>
+            </a:solidFill>
+          </a:ln>
+        </p:spPr>
+        <p:txBody>
+          <a:bodyPr anchor="ctr" anchorCtr="1">
+            <a:normAutofit/>
+          </a:bodyPr>
+          <a:lstStyle>
+            <a:lvl1pPr>
+              <a:defRPr sz="2200">
+                <a:solidFill>
+                  <a:srgbClr val="262626"/>
+                </a:solidFill>
+              </a:defRPr>
+            </a:lvl1pPr>
+          </a:lstStyle>
+          <a:p>
+            <a:r>
+              <a:rPr lang="en-US"/>
+              <a:t>Click to edit Master title style</a:t>
+            </a:r>
+            <a:endParaRPr lang="en-US" dirty="0"/>
+          </a:p>
+        </p:txBody>
+      </p:sp>
+      <p:sp>
+        <p:nvSpPr>
+          <p:cNvPr id="3" name="Content Placeholder 2"/>
+          <p:cNvSpPr>
+            <a:spLocks noGrp="1"/>
+          </p:cNvSpPr>
+          <p:nvPr>
+            <p:ph idx="1"/>
+          </p:nvPr>
+        </p:nvSpPr>
+        <p:spPr>
+          <a:xfrm>
+            <a:off x="6736080" y="804672"/>
+            <a:ext cx="4815840" cy="5248656"/>
           </a:xfrm>
         </p:spPr>
         <p:txBody>
-          <a:bodyPr anchor="b"/>
+          <a:bodyPr>
+            <a:normAutofit/>
+          </a:bodyPr>
           <a:lstStyle>
             <a:lvl1pPr>
-              <a:defRPr sz="3200"/>
+              <a:defRPr sz="1900">
+                <a:solidFill>
+                  <a:schemeClr val="tx1"/>
+                </a:solidFill>
+              </a:defRPr>
             </a:lvl1pPr>
+            <a:lvl2pPr>
+              <a:defRPr sz="1600">
+                <a:solidFill>
+                  <a:schemeClr val="tx1"/>
+                </a:solidFill>
+              </a:defRPr>
+            </a:lvl2pPr>
+            <a:lvl3pPr>
+              <a:defRPr sz="1600">
+                <a:solidFill>
+                  <a:schemeClr val="tx1"/>
+                </a:solidFill>
+              </a:defRPr>
+            </a:lvl3pPr>
+            <a:lvl4pPr>
+              <a:defRPr sz="1600">
+                <a:solidFill>
+                  <a:schemeClr val="tx1"/>
+                </a:solidFill>
+              </a:defRPr>
+            </a:lvl4pPr>
+            <a:lvl5pPr>
+              <a:defRPr sz="1600">
+                <a:solidFill>
+                  <a:schemeClr val="tx1"/>
+                </a:solidFill>
+              </a:defRPr>
+            </a:lvl5pPr>
+            <a:lvl6pPr>
+              <a:defRPr sz="1600"/>
+            </a:lvl6pPr>
+            <a:lvl7pPr>
+              <a:defRPr sz="1600"/>
+            </a:lvl7pPr>
+            <a:lvl8pPr>
+              <a:defRPr sz="1600"/>
+            </a:lvl8pPr>
+            <a:lvl9pPr>
+              <a:defRPr sz="1600"/>
+            </a:lvl9pPr>
           </a:lstStyle>
           <a:p>
-            <a:r>
-              <a:rPr lang="en-US"/>
-              <a:t>Click to edit Master title style</a:t>
-            </a:r>
-            <a:endParaRPr lang="en-TH"/>
-          </a:p>
-        </p:txBody>
-      </p:sp>
-      <p:sp>
-        <p:nvSpPr>
-          <p:cNvPr id="3" name="Content Placeholder 2">
-            <a:extLst>
-              <a:ext uri="{FF2B5EF4-FFF2-40B4-BE49-F238E27FC236}">
-                <a16:creationId xmlns:a16="http://schemas.microsoft.com/office/drawing/2014/main" id="{C409BC6D-2DD8-E69D-538D-F6A7B14615A0}"/>
-              </a:ext>
-            </a:extLst>
-          </p:cNvPr>
-          <p:cNvSpPr>
-            <a:spLocks noGrp="1"/>
-          </p:cNvSpPr>
-          <p:nvPr>
-            <p:ph idx="1"/>
+            <a:pPr lvl="0"/>
+            <a:r>
+              <a:rPr lang="en-US"/>
+              <a:t>Click to edit Master text styles</a:t>
+            </a:r>
+          </a:p>
+          <a:p>
+            <a:pPr lvl="1"/>
+            <a:r>
+              <a:rPr lang="en-US"/>
+              <a:t>Second level</a:t>
+            </a:r>
+          </a:p>
+          <a:p>
+            <a:pPr lvl="2"/>
+            <a:r>
+              <a:rPr lang="en-US"/>
+              <a:t>Third level</a:t>
+            </a:r>
+          </a:p>
+          <a:p>
+            <a:pPr lvl="3"/>
+            <a:r>
+              <a:rPr lang="en-US"/>
+              <a:t>Fourth level</a:t>
+            </a:r>
+          </a:p>
+          <a:p>
+            <a:pPr lvl="4"/>
+            <a:r>
+              <a:rPr lang="en-US"/>
+              <a:t>Fifth level</a:t>
+            </a:r>
+            <a:endParaRPr lang="en-US" dirty="0"/>
+          </a:p>
+        </p:txBody>
+      </p:sp>
+      <p:sp>
+        <p:nvSpPr>
+          <p:cNvPr id="4" name="Text Placeholder 3"/>
+          <p:cNvSpPr>
+            <a:spLocks noGrp="1"/>
+          </p:cNvSpPr>
+          <p:nvPr>
+            <p:ph type="body" sz="half" idx="2"/>
           </p:nvPr>
         </p:nvSpPr>
         <p:spPr>
           <a:xfrm>
-            <a:off x="5183188" y="987425"/>
-            <a:ext cx="6172200" cy="4873625"/>
+            <a:off x="1115568" y="3549918"/>
+            <a:ext cx="3794760" cy="2194036"/>
           </a:xfrm>
         </p:spPr>
         <p:txBody>
-          <a:bodyPr/>
+          <a:bodyPr anchor="t" anchorCtr="1">
+            <a:normAutofit/>
+          </a:bodyPr>
           <a:lstStyle>
-            <a:lvl1pPr>
-              <a:defRPr sz="3200"/>
-            </a:lvl1pPr>
-            <a:lvl2pPr>
-              <a:defRPr sz="2800"/>
-            </a:lvl2pPr>
-            <a:lvl3pPr>
-              <a:defRPr sz="2400"/>
-            </a:lvl3pPr>
-            <a:lvl4pPr>
-              <a:defRPr sz="2000"/>
-            </a:lvl4pPr>
-            <a:lvl5pPr>
-              <a:defRPr sz="2000"/>
-            </a:lvl5pPr>
-            <a:lvl6pPr>
-              <a:defRPr sz="2000"/>
-            </a:lvl6pPr>
-            <a:lvl7pPr>
-              <a:defRPr sz="2000"/>
-            </a:lvl7pPr>
-            <a:lvl8pPr>
-              <a:defRPr sz="2000"/>
-            </a:lvl8pPr>
-            <a:lvl9pPr>
-              <a:defRPr sz="2000"/>
-            </a:lvl9pPr>
-          </a:lstStyle>
-          <a:p>
-            <a:pPr lvl="0"/>
-            <a:r>
-              <a:rPr lang="en-US"/>
-              <a:t>Click to edit Master text styles</a:t>
-            </a:r>
-          </a:p>
-          <a:p>
-            <a:pPr lvl="1"/>
-            <a:r>
-              <a:rPr lang="en-US"/>
-              <a:t>Second level</a:t>
-            </a:r>
-          </a:p>
-          <a:p>
-            <a:pPr lvl="2"/>
-            <a:r>
-              <a:rPr lang="en-US"/>
-              <a:t>Third level</a:t>
-            </a:r>
-          </a:p>
-          <a:p>
-            <a:pPr lvl="3"/>
-            <a:r>
-              <a:rPr lang="en-US"/>
-              <a:t>Fourth level</a:t>
-            </a:r>
-          </a:p>
-          <a:p>
-            <a:pPr lvl="4"/>
-            <a:r>
-              <a:rPr lang="en-US"/>
-              <a:t>Fifth level</a:t>
-            </a:r>
-            <a:endParaRPr lang="en-TH"/>
-          </a:p>
-        </p:txBody>
-      </p:sp>
-      <p:sp>
-        <p:nvSpPr>
-          <p:cNvPr id="4" name="Text Placeholder 3">
-            <a:extLst>
-              <a:ext uri="{FF2B5EF4-FFF2-40B4-BE49-F238E27FC236}">
-                <a16:creationId xmlns:a16="http://schemas.microsoft.com/office/drawing/2014/main" id="{EEB00E66-4BDD-9F80-C27B-C575F596292F}"/>
-              </a:ext>
-            </a:extLst>
-          </p:cNvPr>
-          <p:cNvSpPr>
-            <a:spLocks noGrp="1"/>
-          </p:cNvSpPr>
-          <p:nvPr>
-            <p:ph type="body" sz="half" idx="2"/>
-          </p:nvPr>
-        </p:nvSpPr>
-        <p:spPr>
-          <a:xfrm>
-            <a:off x="839788" y="2057400"/>
-            <a:ext cx="3932237" cy="3811588"/>
-          </a:xfrm>
-        </p:spPr>
-        <p:txBody>
-          <a:bodyPr/>
-          <a:lstStyle>
-            <a:lvl1pPr marL="0" indent="0">
-              <a:buNone/>
-              <a:defRPr sz="1600"/>
+            <a:lvl1pPr marL="0" indent="0" algn="ctr">
+              <a:buNone/>
+              <a:defRPr sz="1500">
+                <a:solidFill>
+                  <a:srgbClr val="FFFFFF"/>
+                </a:solidFill>
+              </a:defRPr>
             </a:lvl1pPr>
             <a:lvl2pPr marL="457200" indent="0">
               <a:buNone/>
@@ -2372,13 +2228,7 @@
       </p:sp>
       <p:sp>
         <p:nvSpPr>
-          <p:cNvPr id="5" name="Date Placeholder 4">
-            <a:extLst>
-              <a:ext uri="{FF2B5EF4-FFF2-40B4-BE49-F238E27FC236}">
-                <a16:creationId xmlns:a16="http://schemas.microsoft.com/office/drawing/2014/main" id="{77DA7DC7-6A07-06BB-2508-4F7C8094F3DE}"/>
-              </a:ext>
-            </a:extLst>
-          </p:cNvPr>
+          <p:cNvPr id="9" name="Date Placeholder 8"/>
           <p:cNvSpPr>
             <a:spLocks noGrp="1"/>
           </p:cNvSpPr>
@@ -2401,13 +2251,7 @@
       </p:sp>
       <p:sp>
         <p:nvSpPr>
-          <p:cNvPr id="6" name="Footer Placeholder 5">
-            <a:extLst>
-              <a:ext uri="{FF2B5EF4-FFF2-40B4-BE49-F238E27FC236}">
-                <a16:creationId xmlns:a16="http://schemas.microsoft.com/office/drawing/2014/main" id="{87FE67B4-C1EA-FA9F-219B-EB9FB6716BFA}"/>
-              </a:ext>
-            </a:extLst>
-          </p:cNvPr>
+          <p:cNvPr id="10" name="Footer Placeholder 9"/>
           <p:cNvSpPr>
             <a:spLocks noGrp="1"/>
           </p:cNvSpPr>
@@ -2415,10 +2259,25 @@
             <p:ph type="ftr" sz="quarter" idx="11"/>
           </p:nvPr>
         </p:nvSpPr>
-        <p:spPr/>
-        <p:txBody>
-          <a:bodyPr/>
-          <a:lstStyle/>
+        <p:spPr>
+          <a:xfrm>
+            <a:off x="804672" y="6236208"/>
+            <a:ext cx="5124797" cy="320040"/>
+          </a:xfrm>
+        </p:spPr>
+        <p:txBody>
+          <a:bodyPr/>
+          <a:lstStyle>
+            <a:lvl1pPr>
+              <a:defRPr>
+                <a:solidFill>
+                  <a:srgbClr val="FFFFFF">
+                    <a:alpha val="70000"/>
+                  </a:srgbClr>
+                </a:solidFill>
+              </a:defRPr>
+            </a:lvl1pPr>
+          </a:lstStyle>
           <a:p>
             <a:endParaRPr lang="en-TH"/>
           </a:p>
@@ -2426,13 +2285,7 @@
       </p:sp>
       <p:sp>
         <p:nvSpPr>
-          <p:cNvPr id="7" name="Slide Number Placeholder 6">
-            <a:extLst>
-              <a:ext uri="{FF2B5EF4-FFF2-40B4-BE49-F238E27FC236}">
-                <a16:creationId xmlns:a16="http://schemas.microsoft.com/office/drawing/2014/main" id="{B1EA9A79-64DB-00EE-0116-F9FDB3470588}"/>
-              </a:ext>
-            </a:extLst>
-          </p:cNvPr>
+          <p:cNvPr id="11" name="Slide Number Placeholder 10"/>
           <p:cNvSpPr>
             <a:spLocks noGrp="1"/>
           </p:cNvSpPr>
@@ -2456,7 +2309,7 @@
     </p:spTree>
     <p:extLst>
       <p:ext uri="{BB962C8B-B14F-4D97-AF65-F5344CB8AC3E}">
-        <p14:creationId xmlns:p14="http://schemas.microsoft.com/office/powerpoint/2010/main" val="1674743472"/>
+        <p14:creationId xmlns:p14="http://schemas.microsoft.com/office/powerpoint/2010/main" val="3362923922"/>
       </p:ext>
     </p:extLst>
   </p:cSld>
@@ -2485,31 +2338,77 @@
       </p:grpSpPr>
       <p:sp>
         <p:nvSpPr>
-          <p:cNvPr id="2" name="Title 1">
-            <a:extLst>
-              <a:ext uri="{FF2B5EF4-FFF2-40B4-BE49-F238E27FC236}">
-                <a16:creationId xmlns:a16="http://schemas.microsoft.com/office/drawing/2014/main" id="{F6669CC3-DC35-C7A9-F104-B041EF4DCD4C}"/>
-              </a:ext>
-            </a:extLst>
-          </p:cNvPr>
-          <p:cNvSpPr>
-            <a:spLocks noGrp="1"/>
-          </p:cNvSpPr>
-          <p:nvPr>
-            <p:ph type="title"/>
-          </p:nvPr>
+          <p:cNvPr id="18" name="Rectangle 17"/>
+          <p:cNvSpPr/>
+          <p:nvPr/>
         </p:nvSpPr>
         <p:spPr>
           <a:xfrm>
-            <a:off x="839788" y="457200"/>
-            <a:ext cx="3932237" cy="1600200"/>
+            <a:off x="0" y="0"/>
+            <a:ext cx="6095999" cy="6858000"/>
           </a:xfrm>
+          <a:prstGeom prst="rect">
+            <a:avLst/>
+          </a:prstGeom>
+          <a:solidFill>
+            <a:schemeClr val="accent2"/>
+          </a:solidFill>
+          <a:ln>
+            <a:noFill/>
+          </a:ln>
         </p:spPr>
-        <p:txBody>
-          <a:bodyPr anchor="b"/>
+        <p:style>
+          <a:lnRef idx="2">
+            <a:schemeClr val="accent1">
+              <a:shade val="50000"/>
+            </a:schemeClr>
+          </a:lnRef>
+          <a:fillRef idx="1">
+            <a:schemeClr val="accent1"/>
+          </a:fillRef>
+          <a:effectRef idx="0">
+            <a:schemeClr val="accent1"/>
+          </a:effectRef>
+          <a:fontRef idx="minor">
+            <a:schemeClr val="lt1"/>
+          </a:fontRef>
+        </p:style>
+      </p:sp>
+      <p:sp>
+        <p:nvSpPr>
+          <p:cNvPr id="2" name="Title 1"/>
+          <p:cNvSpPr>
+            <a:spLocks noGrp="1"/>
+          </p:cNvSpPr>
+          <p:nvPr>
+            <p:ph type="title"/>
+          </p:nvPr>
+        </p:nvSpPr>
+        <p:spPr bwMode="blackWhite">
+          <a:xfrm>
+            <a:off x="808523" y="2243828"/>
+            <a:ext cx="4494998" cy="1134640"/>
+          </a:xfrm>
+          <a:solidFill>
+            <a:srgbClr val="FFFFFF"/>
+          </a:solidFill>
+          <a:ln>
+            <a:solidFill>
+              <a:srgbClr val="404040"/>
+            </a:solidFill>
+          </a:ln>
+        </p:spPr>
+        <p:txBody>
+          <a:bodyPr anchor="ctr" anchorCtr="1">
+            <a:noAutofit/>
+          </a:bodyPr>
           <a:lstStyle>
             <a:lvl1pPr>
-              <a:defRPr sz="3200"/>
+              <a:defRPr sz="2200">
+                <a:solidFill>
+                  <a:srgbClr val="262626"/>
+                </a:solidFill>
+              </a:defRPr>
             </a:lvl1pPr>
           </a:lstStyle>
           <a:p>
@@ -2517,21 +2416,15 @@
               <a:rPr lang="en-US"/>
               <a:t>Click to edit Master title style</a:t>
             </a:r>
-            <a:endParaRPr lang="en-TH"/>
-          </a:p>
-        </p:txBody>
-      </p:sp>
-      <p:sp>
-        <p:nvSpPr>
-          <p:cNvPr id="3" name="Picture Placeholder 2">
-            <a:extLst>
-              <a:ext uri="{FF2B5EF4-FFF2-40B4-BE49-F238E27FC236}">
-                <a16:creationId xmlns:a16="http://schemas.microsoft.com/office/drawing/2014/main" id="{BC5A71DC-CE42-B2AC-949C-E7EE1334AE73}"/>
-              </a:ext>
-            </a:extLst>
-          </p:cNvPr>
-          <p:cNvSpPr>
-            <a:spLocks noGrp="1"/>
+            <a:endParaRPr lang="en-US" dirty="0"/>
+          </a:p>
+        </p:txBody>
+      </p:sp>
+      <p:sp>
+        <p:nvSpPr>
+          <p:cNvPr id="3" name="Picture Placeholder 2"/>
+          <p:cNvSpPr>
+            <a:spLocks noGrp="1" noChangeAspect="1"/>
           </p:cNvSpPr>
           <p:nvPr>
             <p:ph type="pic" idx="1"/>
@@ -2539,16 +2432,28 @@
         </p:nvSpPr>
         <p:spPr>
           <a:xfrm>
-            <a:off x="5183188" y="987425"/>
-            <a:ext cx="6172200" cy="4873625"/>
+            <a:off x="6095999" y="0"/>
+            <a:ext cx="6102097" cy="6858000"/>
           </a:xfrm>
+          <a:solidFill>
+            <a:schemeClr val="bg1">
+              <a:lumMod val="75000"/>
+            </a:schemeClr>
+          </a:solidFill>
         </p:spPr>
         <p:txBody>
-          <a:bodyPr/>
+          <a:bodyPr anchor="t"/>
           <a:lstStyle>
             <a:lvl1pPr marL="0" indent="0">
               <a:buNone/>
-              <a:defRPr sz="3200"/>
+              <a:defRPr sz="3200">
+                <a:solidFill>
+                  <a:schemeClr val="bg1">
+                    <a:lumMod val="85000"/>
+                    <a:lumOff val="15000"/>
+                  </a:schemeClr>
+                </a:solidFill>
+              </a:defRPr>
             </a:lvl1pPr>
             <a:lvl2pPr marL="457200" indent="0">
               <a:buNone/>
@@ -2584,19 +2489,17 @@
             </a:lvl9pPr>
           </a:lstStyle>
           <a:p>
-            <a:endParaRPr lang="en-TH"/>
-          </a:p>
-        </p:txBody>
-      </p:sp>
-      <p:sp>
-        <p:nvSpPr>
-          <p:cNvPr id="4" name="Text Placeholder 3">
-            <a:extLst>
-              <a:ext uri="{FF2B5EF4-FFF2-40B4-BE49-F238E27FC236}">
-                <a16:creationId xmlns:a16="http://schemas.microsoft.com/office/drawing/2014/main" id="{774895F0-A907-716F-E4FA-CDCD1A3E0D2C}"/>
-              </a:ext>
-            </a:extLst>
-          </p:cNvPr>
+            <a:r>
+              <a:rPr lang="en-US"/>
+              <a:t>Click icon to add picture</a:t>
+            </a:r>
+            <a:endParaRPr lang="en-US" dirty="0"/>
+          </a:p>
+        </p:txBody>
+      </p:sp>
+      <p:sp>
+        <p:nvSpPr>
+          <p:cNvPr id="4" name="Text Placeholder 3"/>
           <p:cNvSpPr>
             <a:spLocks noGrp="1"/>
           </p:cNvSpPr>
@@ -2606,16 +2509,22 @@
         </p:nvSpPr>
         <p:spPr>
           <a:xfrm>
-            <a:off x="839788" y="2057400"/>
-            <a:ext cx="3932237" cy="3811588"/>
+            <a:off x="1115568" y="3549918"/>
+            <a:ext cx="3794760" cy="2194037"/>
           </a:xfrm>
         </p:spPr>
         <p:txBody>
-          <a:bodyPr/>
+          <a:bodyPr anchor="t" anchorCtr="1">
+            <a:normAutofit/>
+          </a:bodyPr>
           <a:lstStyle>
-            <a:lvl1pPr marL="0" indent="0">
-              <a:buNone/>
-              <a:defRPr sz="1600"/>
+            <a:lvl1pPr marL="0" indent="0" algn="ctr">
+              <a:buNone/>
+              <a:defRPr sz="1500">
+                <a:solidFill>
+                  <a:srgbClr val="FFFFFF"/>
+                </a:solidFill>
+              </a:defRPr>
             </a:lvl1pPr>
             <a:lvl2pPr marL="457200" indent="0">
               <a:buNone/>
@@ -2661,13 +2570,7 @@
       </p:sp>
       <p:sp>
         <p:nvSpPr>
-          <p:cNvPr id="5" name="Date Placeholder 4">
-            <a:extLst>
-              <a:ext uri="{FF2B5EF4-FFF2-40B4-BE49-F238E27FC236}">
-                <a16:creationId xmlns:a16="http://schemas.microsoft.com/office/drawing/2014/main" id="{D07807D5-BF1E-592F-8DE1-76DC285FA103}"/>
-              </a:ext>
-            </a:extLst>
-          </p:cNvPr>
+          <p:cNvPr id="8" name="Date Placeholder 7"/>
           <p:cNvSpPr>
             <a:spLocks noGrp="1"/>
           </p:cNvSpPr>
@@ -2678,7 +2581,22 @@
         <p:spPr/>
         <p:txBody>
           <a:bodyPr/>
-          <a:lstStyle/>
+          <a:lstStyle>
+            <a:lvl1pPr>
+              <a:defRPr>
+                <a:solidFill>
+                  <a:srgbClr val="FFFFFF"/>
+                </a:solidFill>
+                <a:effectLst>
+                  <a:outerShdw blurRad="50800" dist="38100" dir="2700000" algn="tl" rotWithShape="0">
+                    <a:prstClr val="black">
+                      <a:alpha val="43000"/>
+                    </a:prstClr>
+                  </a:outerShdw>
+                </a:effectLst>
+              </a:defRPr>
+            </a:lvl1pPr>
+          </a:lstStyle>
           <a:p>
             <a:fld id="{CAFD788F-134A-A74B-810A-CD2D2393E82C}" type="datetimeFigureOut">
               <a:rPr lang="en-TH" smtClean="0"/>
@@ -2690,13 +2608,7 @@
       </p:sp>
       <p:sp>
         <p:nvSpPr>
-          <p:cNvPr id="6" name="Footer Placeholder 5">
-            <a:extLst>
-              <a:ext uri="{FF2B5EF4-FFF2-40B4-BE49-F238E27FC236}">
-                <a16:creationId xmlns:a16="http://schemas.microsoft.com/office/drawing/2014/main" id="{A14A906E-157B-BAAE-D988-B64641E0AD44}"/>
-              </a:ext>
-            </a:extLst>
-          </p:cNvPr>
+          <p:cNvPr id="9" name="Footer Placeholder 8"/>
           <p:cNvSpPr>
             <a:spLocks noGrp="1"/>
           </p:cNvSpPr>
@@ -2704,10 +2616,25 @@
             <p:ph type="ftr" sz="quarter" idx="11"/>
           </p:nvPr>
         </p:nvSpPr>
-        <p:spPr/>
-        <p:txBody>
-          <a:bodyPr/>
-          <a:lstStyle/>
+        <p:spPr>
+          <a:xfrm>
+            <a:off x="804672" y="6236208"/>
+            <a:ext cx="5124797" cy="320040"/>
+          </a:xfrm>
+        </p:spPr>
+        <p:txBody>
+          <a:bodyPr/>
+          <a:lstStyle>
+            <a:lvl1pPr>
+              <a:defRPr>
+                <a:solidFill>
+                  <a:srgbClr val="FFFFFF">
+                    <a:alpha val="70000"/>
+                  </a:srgbClr>
+                </a:solidFill>
+              </a:defRPr>
+            </a:lvl1pPr>
+          </a:lstStyle>
           <a:p>
             <a:endParaRPr lang="en-TH"/>
           </a:p>
@@ -2715,13 +2642,7 @@
       </p:sp>
       <p:sp>
         <p:nvSpPr>
-          <p:cNvPr id="7" name="Slide Number Placeholder 6">
-            <a:extLst>
-              <a:ext uri="{FF2B5EF4-FFF2-40B4-BE49-F238E27FC236}">
-                <a16:creationId xmlns:a16="http://schemas.microsoft.com/office/drawing/2014/main" id="{E88B6CF9-5BCF-A6B6-4E84-89614D9FEDE0}"/>
-              </a:ext>
-            </a:extLst>
-          </p:cNvPr>
+          <p:cNvPr id="10" name="Slide Number Placeholder 9"/>
           <p:cNvSpPr>
             <a:spLocks noGrp="1"/>
           </p:cNvSpPr>
@@ -2745,7 +2666,7 @@
     </p:spTree>
     <p:extLst>
       <p:ext uri="{BB962C8B-B14F-4D97-AF65-F5344CB8AC3E}">
-        <p14:creationId xmlns:p14="http://schemas.microsoft.com/office/powerpoint/2010/main" val="737803485"/>
+        <p14:creationId xmlns:p14="http://schemas.microsoft.com/office/powerpoint/2010/main" val="1999950531"/>
       </p:ext>
     </p:extLst>
   </p:cSld>
@@ -2759,9 +2680,14 @@
 <p:sldMaster xmlns:a="http://schemas.openxmlformats.org/drawingml/2006/main" xmlns:r="http://schemas.openxmlformats.org/officeDocument/2006/relationships" xmlns:p="http://schemas.openxmlformats.org/presentationml/2006/main">
   <p:cSld>
     <p:bg>
-      <p:bgRef idx="1001">
-        <a:schemeClr val="bg1"/>
-      </p:bgRef>
+      <p:bgPr>
+        <a:solidFill>
+          <a:schemeClr val="bg1">
+            <a:lumMod val="95000"/>
+          </a:schemeClr>
+        </a:solidFill>
+        <a:effectLst/>
+      </p:bgPr>
     </p:bg>
     <p:spTree>
       <p:nvGrpSpPr>
@@ -2779,131 +2705,163 @@
       </p:grpSpPr>
       <p:sp>
         <p:nvSpPr>
-          <p:cNvPr id="2" name="Title Placeholder 1">
-            <a:extLst>
-              <a:ext uri="{FF2B5EF4-FFF2-40B4-BE49-F238E27FC236}">
-                <a16:creationId xmlns:a16="http://schemas.microsoft.com/office/drawing/2014/main" id="{88FBAC44-6396-E044-98E4-740918C192F1}"/>
-              </a:ext>
-            </a:extLst>
-          </p:cNvPr>
+          <p:cNvPr id="2" name="Title Placeholder 1"/>
           <p:cNvSpPr>
             <a:spLocks noGrp="1"/>
           </p:cNvSpPr>
           <p:nvPr>
             <p:ph type="title"/>
+          </p:nvPr>
+        </p:nvSpPr>
+        <p:spPr bwMode="black">
+          <a:xfrm>
+            <a:off x="2231136" y="964692"/>
+            <a:ext cx="7729728" cy="1188720"/>
+          </a:xfrm>
+          <a:prstGeom prst="rect">
+            <a:avLst/>
+          </a:prstGeom>
+          <a:solidFill>
+            <a:srgbClr val="FFFFFF"/>
+          </a:solidFill>
+          <a:ln w="31750" cap="sq">
+            <a:solidFill>
+              <a:srgbClr val="404040"/>
+            </a:solidFill>
+            <a:miter lim="800000"/>
+          </a:ln>
+        </p:spPr>
+        <p:txBody>
+          <a:bodyPr vert="horz" lIns="182880" tIns="182880" rIns="182880" bIns="182880" rtlCol="0" anchor="ctr">
+            <a:normAutofit/>
+          </a:bodyPr>
+          <a:lstStyle/>
+          <a:p>
+            <a:r>
+              <a:rPr lang="en-US"/>
+              <a:t>Click to edit Master title style</a:t>
+            </a:r>
+            <a:endParaRPr lang="en-US" dirty="0"/>
+          </a:p>
+        </p:txBody>
+      </p:sp>
+      <p:sp>
+        <p:nvSpPr>
+          <p:cNvPr id="3" name="Text Placeholder 2"/>
+          <p:cNvSpPr>
+            <a:spLocks noGrp="1"/>
+          </p:cNvSpPr>
+          <p:nvPr>
+            <p:ph type="body" idx="1"/>
           </p:nvPr>
         </p:nvSpPr>
         <p:spPr>
           <a:xfrm>
-            <a:off x="838200" y="365125"/>
-            <a:ext cx="10515600" cy="1325563"/>
+            <a:off x="2231136" y="2638044"/>
+            <a:ext cx="7729728" cy="3101983"/>
           </a:xfrm>
           <a:prstGeom prst="rect">
             <a:avLst/>
           </a:prstGeom>
         </p:spPr>
         <p:txBody>
-          <a:bodyPr vert="horz" lIns="91440" tIns="45720" rIns="91440" bIns="45720" rtlCol="0" anchor="ctr">
+          <a:bodyPr vert="horz" lIns="91440" tIns="45720" rIns="91440" bIns="45720" rtlCol="0">
             <a:normAutofit/>
           </a:bodyPr>
           <a:lstStyle/>
           <a:p>
-            <a:r>
-              <a:rPr lang="en-US"/>
-              <a:t>Click to edit Master title style</a:t>
-            </a:r>
-            <a:endParaRPr lang="en-TH"/>
-          </a:p>
-        </p:txBody>
-      </p:sp>
-      <p:sp>
-        <p:nvSpPr>
-          <p:cNvPr id="3" name="Text Placeholder 2">
-            <a:extLst>
-              <a:ext uri="{FF2B5EF4-FFF2-40B4-BE49-F238E27FC236}">
-                <a16:creationId xmlns:a16="http://schemas.microsoft.com/office/drawing/2014/main" id="{3D84B174-812E-4314-0D0C-C9C8D42C9054}"/>
-              </a:ext>
-            </a:extLst>
-          </p:cNvPr>
-          <p:cNvSpPr>
-            <a:spLocks noGrp="1"/>
-          </p:cNvSpPr>
-          <p:nvPr>
-            <p:ph type="body" idx="1"/>
+            <a:pPr lvl="0"/>
+            <a:r>
+              <a:rPr lang="en-US"/>
+              <a:t>Click to edit Master text styles</a:t>
+            </a:r>
+          </a:p>
+          <a:p>
+            <a:pPr lvl="1"/>
+            <a:r>
+              <a:rPr lang="en-US"/>
+              <a:t>Second level</a:t>
+            </a:r>
+          </a:p>
+          <a:p>
+            <a:pPr lvl="2"/>
+            <a:r>
+              <a:rPr lang="en-US"/>
+              <a:t>Third level</a:t>
+            </a:r>
+          </a:p>
+          <a:p>
+            <a:pPr lvl="3"/>
+            <a:r>
+              <a:rPr lang="en-US"/>
+              <a:t>Fourth level</a:t>
+            </a:r>
+          </a:p>
+          <a:p>
+            <a:pPr lvl="4"/>
+            <a:r>
+              <a:rPr lang="en-US"/>
+              <a:t>Fifth level</a:t>
+            </a:r>
+            <a:endParaRPr lang="en-US" dirty="0"/>
+          </a:p>
+        </p:txBody>
+      </p:sp>
+      <p:sp>
+        <p:nvSpPr>
+          <p:cNvPr id="4" name="Date Placeholder 3"/>
+          <p:cNvSpPr>
+            <a:spLocks noGrp="1"/>
+          </p:cNvSpPr>
+          <p:nvPr>
+            <p:ph type="dt" sz="half" idx="2"/>
           </p:nvPr>
         </p:nvSpPr>
         <p:spPr>
           <a:xfrm>
-            <a:off x="838200" y="1825625"/>
-            <a:ext cx="10515600" cy="4351338"/>
+            <a:off x="7821429" y="6238816"/>
+            <a:ext cx="2753746" cy="323968"/>
           </a:xfrm>
           <a:prstGeom prst="rect">
             <a:avLst/>
           </a:prstGeom>
         </p:spPr>
         <p:txBody>
-          <a:bodyPr vert="horz" lIns="91440" tIns="45720" rIns="91440" bIns="45720" rtlCol="0">
-            <a:normAutofit/>
-          </a:bodyPr>
-          <a:lstStyle/>
-          <a:p>
-            <a:pPr lvl="0"/>
-            <a:r>
-              <a:rPr lang="en-US"/>
-              <a:t>Click to edit Master text styles</a:t>
-            </a:r>
-          </a:p>
-          <a:p>
-            <a:pPr lvl="1"/>
-            <a:r>
-              <a:rPr lang="en-US"/>
-              <a:t>Second level</a:t>
-            </a:r>
-          </a:p>
-          <a:p>
-            <a:pPr lvl="2"/>
-            <a:r>
-              <a:rPr lang="en-US"/>
-              <a:t>Third level</a:t>
-            </a:r>
-          </a:p>
-          <a:p>
-            <a:pPr lvl="3"/>
-            <a:r>
-              <a:rPr lang="en-US"/>
-              <a:t>Fourth level</a:t>
-            </a:r>
-          </a:p>
-          <a:p>
-            <a:pPr lvl="4"/>
-            <a:r>
-              <a:rPr lang="en-US"/>
-              <a:t>Fifth level</a:t>
-            </a:r>
+          <a:bodyPr vert="horz" lIns="91440" tIns="45720" rIns="91440" bIns="45720" rtlCol="0" anchor="ctr"/>
+          <a:lstStyle>
+            <a:lvl1pPr algn="r">
+              <a:defRPr sz="1050">
+                <a:solidFill>
+                  <a:schemeClr val="tx1">
+                    <a:alpha val="70000"/>
+                  </a:schemeClr>
+                </a:solidFill>
+              </a:defRPr>
+            </a:lvl1pPr>
+          </a:lstStyle>
+          <a:p>
+            <a:fld id="{CAFD788F-134A-A74B-810A-CD2D2393E82C}" type="datetimeFigureOut">
+              <a:rPr lang="en-TH" smtClean="0"/>
+              <a:t>19/6/2024 R</a:t>
+            </a:fld>
             <a:endParaRPr lang="en-TH"/>
           </a:p>
         </p:txBody>
       </p:sp>
       <p:sp>
         <p:nvSpPr>
-          <p:cNvPr id="4" name="Date Placeholder 3">
-            <a:extLst>
-              <a:ext uri="{FF2B5EF4-FFF2-40B4-BE49-F238E27FC236}">
-                <a16:creationId xmlns:a16="http://schemas.microsoft.com/office/drawing/2014/main" id="{7873578B-1798-EDD1-7491-635D250BAE81}"/>
-              </a:ext>
-            </a:extLst>
-          </p:cNvPr>
-          <p:cNvSpPr>
-            <a:spLocks noGrp="1"/>
-          </p:cNvSpPr>
-          <p:nvPr>
-            <p:ph type="dt" sz="half" idx="2"/>
+          <p:cNvPr id="5" name="Footer Placeholder 4"/>
+          <p:cNvSpPr>
+            <a:spLocks noGrp="1"/>
+          </p:cNvSpPr>
+          <p:nvPr>
+            <p:ph type="ftr" sz="quarter" idx="3"/>
           </p:nvPr>
         </p:nvSpPr>
         <p:spPr>
           <a:xfrm>
-            <a:off x="838200" y="6356350"/>
-            <a:ext cx="2743200" cy="365125"/>
+            <a:off x="1600200" y="6236208"/>
+            <a:ext cx="5901189" cy="320040"/>
           </a:xfrm>
           <a:prstGeom prst="rect">
             <a:avLst/>
@@ -2913,101 +2871,53 @@
           <a:bodyPr vert="horz" lIns="91440" tIns="45720" rIns="91440" bIns="45720" rtlCol="0" anchor="ctr"/>
           <a:lstStyle>
             <a:lvl1pPr algn="l">
-              <a:defRPr sz="1200">
+              <a:defRPr sz="1050">
                 <a:solidFill>
                   <a:schemeClr val="tx1">
-                    <a:tint val="82000"/>
+                    <a:alpha val="70000"/>
                   </a:schemeClr>
                 </a:solidFill>
               </a:defRPr>
             </a:lvl1pPr>
           </a:lstStyle>
           <a:p>
-            <a:fld id="{CAFD788F-134A-A74B-810A-CD2D2393E82C}" type="datetimeFigureOut">
-              <a:rPr lang="en-TH" smtClean="0"/>
-              <a:t>19/6/2024 R</a:t>
-            </a:fld>
             <a:endParaRPr lang="en-TH"/>
           </a:p>
         </p:txBody>
       </p:sp>
       <p:sp>
         <p:nvSpPr>
-          <p:cNvPr id="5" name="Footer Placeholder 4">
-            <a:extLst>
-              <a:ext uri="{FF2B5EF4-FFF2-40B4-BE49-F238E27FC236}">
-                <a16:creationId xmlns:a16="http://schemas.microsoft.com/office/drawing/2014/main" id="{42E3F096-C839-5AA5-E22C-046B085BF950}"/>
-              </a:ext>
-            </a:extLst>
-          </p:cNvPr>
-          <p:cNvSpPr>
-            <a:spLocks noGrp="1"/>
-          </p:cNvSpPr>
-          <p:nvPr>
-            <p:ph type="ftr" sz="quarter" idx="3"/>
+          <p:cNvPr id="6" name="Slide Number Placeholder 5"/>
+          <p:cNvSpPr>
+            <a:spLocks noGrp="1"/>
+          </p:cNvSpPr>
+          <p:nvPr>
+            <p:ph type="sldNum" sz="quarter" idx="4"/>
           </p:nvPr>
         </p:nvSpPr>
         <p:spPr>
           <a:xfrm>
-            <a:off x="4038600" y="6356350"/>
-            <a:ext cx="4114800" cy="365125"/>
+            <a:off x="10758922" y="6217920"/>
+            <a:ext cx="365760" cy="365760"/>
           </a:xfrm>
-          <a:prstGeom prst="rect">
+          <a:prstGeom prst="ellipse">
             <a:avLst/>
           </a:prstGeom>
+          <a:solidFill>
+            <a:srgbClr val="1D1D1D">
+              <a:alpha val="70000"/>
+            </a:srgbClr>
+          </a:solidFill>
         </p:spPr>
         <p:txBody>
-          <a:bodyPr vert="horz" lIns="91440" tIns="45720" rIns="91440" bIns="45720" rtlCol="0" anchor="ctr"/>
+          <a:bodyPr vert="horz" lIns="18288" tIns="45720" rIns="18288" bIns="45720" rtlCol="0" anchor="ctr">
+            <a:noAutofit/>
+          </a:bodyPr>
           <a:lstStyle>
             <a:lvl1pPr algn="ctr">
-              <a:defRPr sz="1200">
+              <a:defRPr sz="1100" spc="0" baseline="0">
                 <a:solidFill>
-                  <a:schemeClr val="tx1">
-                    <a:tint val="82000"/>
-                  </a:schemeClr>
-                </a:solidFill>
-              </a:defRPr>
-            </a:lvl1pPr>
-          </a:lstStyle>
-          <a:p>
-            <a:endParaRPr lang="en-TH"/>
-          </a:p>
-        </p:txBody>
-      </p:sp>
-      <p:sp>
-        <p:nvSpPr>
-          <p:cNvPr id="6" name="Slide Number Placeholder 5">
-            <a:extLst>
-              <a:ext uri="{FF2B5EF4-FFF2-40B4-BE49-F238E27FC236}">
-                <a16:creationId xmlns:a16="http://schemas.microsoft.com/office/drawing/2014/main" id="{A7EF0979-A87D-7895-CA44-08441DE1C117}"/>
-              </a:ext>
-            </a:extLst>
-          </p:cNvPr>
-          <p:cNvSpPr>
-            <a:spLocks noGrp="1"/>
-          </p:cNvSpPr>
-          <p:nvPr>
-            <p:ph type="sldNum" sz="quarter" idx="4"/>
-          </p:nvPr>
-        </p:nvSpPr>
-        <p:spPr>
-          <a:xfrm>
-            <a:off x="8610600" y="6356350"/>
-            <a:ext cx="2743200" cy="365125"/>
-          </a:xfrm>
-          <a:prstGeom prst="rect">
-            <a:avLst/>
-          </a:prstGeom>
-        </p:spPr>
-        <p:txBody>
-          <a:bodyPr vert="horz" lIns="91440" tIns="45720" rIns="91440" bIns="45720" rtlCol="0" anchor="ctr"/>
-          <a:lstStyle>
-            <a:lvl1pPr algn="r">
-              <a:defRPr sz="1200">
-                <a:solidFill>
-                  <a:schemeClr val="tx1">
-                    <a:tint val="82000"/>
-                  </a:schemeClr>
+                  <a:srgbClr val="FFFFFF"/>
                 </a:solidFill>
               </a:defRPr>
             </a:lvl1pPr>
@@ -3024,27 +2934,27 @@
     </p:spTree>
     <p:extLst>
       <p:ext uri="{BB962C8B-B14F-4D97-AF65-F5344CB8AC3E}">
-        <p14:creationId xmlns:p14="http://schemas.microsoft.com/office/powerpoint/2010/main" val="2656589844"/>
+        <p14:creationId xmlns:p14="http://schemas.microsoft.com/office/powerpoint/2010/main" val="3375773296"/>
       </p:ext>
     </p:extLst>
   </p:cSld>
   <p:clrMap bg1="lt1" tx1="dk1" bg2="lt2" tx2="dk2" accent1="accent1" accent2="accent2" accent3="accent3" accent4="accent4" accent5="accent5" accent6="accent6" hlink="hlink" folHlink="folHlink"/>
   <p:sldLayoutIdLst>
-    <p:sldLayoutId id="2147483649" r:id="rId1"/>
-    <p:sldLayoutId id="2147483650" r:id="rId2"/>
-    <p:sldLayoutId id="2147483651" r:id="rId3"/>
-    <p:sldLayoutId id="2147483652" r:id="rId4"/>
-    <p:sldLayoutId id="2147483653" r:id="rId5"/>
-    <p:sldLayoutId id="2147483654" r:id="rId6"/>
-    <p:sldLayoutId id="2147483655" r:id="rId7"/>
-    <p:sldLayoutId id="2147483656" r:id="rId8"/>
-    <p:sldLayoutId id="2147483657" r:id="rId9"/>
-    <p:sldLayoutId id="2147483658" r:id="rId10"/>
-    <p:sldLayoutId id="2147483659" r:id="rId11"/>
+    <p:sldLayoutId id="2147483661" r:id="rId1"/>
+    <p:sldLayoutId id="2147483662" r:id="rId2"/>
+    <p:sldLayoutId id="2147483663" r:id="rId3"/>
+    <p:sldLayoutId id="2147483664" r:id="rId4"/>
+    <p:sldLayoutId id="2147483665" r:id="rId5"/>
+    <p:sldLayoutId id="2147483666" r:id="rId6"/>
+    <p:sldLayoutId id="2147483667" r:id="rId7"/>
+    <p:sldLayoutId id="2147483668" r:id="rId8"/>
+    <p:sldLayoutId id="2147483669" r:id="rId9"/>
+    <p:sldLayoutId id="2147483670" r:id="rId10"/>
+    <p:sldLayoutId id="2147483671" r:id="rId11"/>
   </p:sldLayoutIdLst>
   <p:txStyles>
     <p:titleStyle>
-      <a:lvl1pPr algn="l" defTabSz="914400" rtl="0" eaLnBrk="1" latinLnBrk="0" hangingPunct="1">
+      <a:lvl1pPr algn="ctr" defTabSz="914400" rtl="0" eaLnBrk="1" latinLnBrk="0" hangingPunct="1">
         <a:lnSpc>
           <a:spcPct val="90000"/>
         </a:lnSpc>
@@ -3052,9 +2962,9 @@
           <a:spcPct val="0"/>
         </a:spcBef>
         <a:buNone/>
-        <a:defRPr sz="4400" kern="1200">
+        <a:defRPr sz="2800" kern="1200" cap="all" spc="200" baseline="0">
           <a:solidFill>
-            <a:schemeClr val="tx1"/>
+            <a:srgbClr val="262626"/>
           </a:solidFill>
           <a:latin typeface="+mj-lt"/>
           <a:ea typeface="+mj-ea"/>
@@ -3065,104 +2975,137 @@
     <p:bodyStyle>
       <a:lvl1pPr marL="228600" indent="-228600" algn="l" defTabSz="914400" rtl="0" eaLnBrk="1" latinLnBrk="0" hangingPunct="1">
         <a:lnSpc>
-          <a:spcPct val="90000"/>
+          <a:spcPct val="100000"/>
         </a:lnSpc>
         <a:spcBef>
           <a:spcPts val="1000"/>
         </a:spcBef>
+        <a:buClr>
+          <a:schemeClr val="accent2"/>
+        </a:buClr>
         <a:buFont typeface="Arial" panose="020B0604020202020204" pitchFamily="34" charset="0"/>
         <a:buChar char="•"/>
-        <a:defRPr sz="2800" kern="1200">
+        <a:defRPr sz="1800" kern="1200">
           <a:solidFill>
-            <a:schemeClr val="tx1"/>
+            <a:schemeClr val="tx1">
+              <a:lumMod val="85000"/>
+              <a:lumOff val="15000"/>
+            </a:schemeClr>
           </a:solidFill>
           <a:latin typeface="+mn-lt"/>
           <a:ea typeface="+mn-ea"/>
           <a:cs typeface="+mn-cs"/>
         </a:defRPr>
       </a:lvl1pPr>
-      <a:lvl2pPr marL="685800" indent="-228600" algn="l" defTabSz="914400" rtl="0" eaLnBrk="1" latinLnBrk="0" hangingPunct="1">
+      <a:lvl2pPr marL="457200" indent="-228600" algn="l" defTabSz="914400" rtl="0" eaLnBrk="1" latinLnBrk="0" hangingPunct="1">
         <a:lnSpc>
-          <a:spcPct val="90000"/>
+          <a:spcPct val="100000"/>
         </a:lnSpc>
         <a:spcBef>
-          <a:spcPts val="500"/>
+          <a:spcPts val="1000"/>
         </a:spcBef>
+        <a:buClr>
+          <a:schemeClr val="accent2"/>
+        </a:buClr>
         <a:buFont typeface="Arial" panose="020B0604020202020204" pitchFamily="34" charset="0"/>
         <a:buChar char="•"/>
-        <a:defRPr sz="2400" kern="1200">
+        <a:defRPr sz="1600" kern="1200">
           <a:solidFill>
-            <a:schemeClr val="tx1"/>
+            <a:schemeClr val="tx1">
+              <a:lumMod val="85000"/>
+              <a:lumOff val="15000"/>
+            </a:schemeClr>
           </a:solidFill>
           <a:latin typeface="+mn-lt"/>
           <a:ea typeface="+mn-ea"/>
           <a:cs typeface="+mn-cs"/>
         </a:defRPr>
       </a:lvl2pPr>
-      <a:lvl3pPr marL="1143000" indent="-228600" algn="l" defTabSz="914400" rtl="0" eaLnBrk="1" latinLnBrk="0" hangingPunct="1">
+      <a:lvl3pPr marL="685800" indent="-228600" algn="l" defTabSz="914400" rtl="0" eaLnBrk="1" latinLnBrk="0" hangingPunct="1">
         <a:lnSpc>
-          <a:spcPct val="90000"/>
+          <a:spcPct val="100000"/>
         </a:lnSpc>
         <a:spcBef>
-          <a:spcPts val="500"/>
+          <a:spcPts val="1000"/>
         </a:spcBef>
+        <a:buClr>
+          <a:schemeClr val="accent2"/>
+        </a:buClr>
         <a:buFont typeface="Arial" panose="020B0604020202020204" pitchFamily="34" charset="0"/>
         <a:buChar char="•"/>
-        <a:defRPr sz="2000" kern="1200">
+        <a:defRPr sz="1600" kern="1200">
           <a:solidFill>
-            <a:schemeClr val="tx1"/>
+            <a:schemeClr val="tx1">
+              <a:lumMod val="85000"/>
+              <a:lumOff val="15000"/>
+            </a:schemeClr>
           </a:solidFill>
           <a:latin typeface="+mn-lt"/>
           <a:ea typeface="+mn-ea"/>
           <a:cs typeface="+mn-cs"/>
         </a:defRPr>
       </a:lvl3pPr>
-      <a:lvl4pPr marL="1600200" indent="-228600" algn="l" defTabSz="914400" rtl="0" eaLnBrk="1" latinLnBrk="0" hangingPunct="1">
+      <a:lvl4pPr marL="914400" indent="-228600" algn="l" defTabSz="914400" rtl="0" eaLnBrk="1" latinLnBrk="0" hangingPunct="1">
         <a:lnSpc>
-          <a:spcPct val="90000"/>
+          <a:spcPct val="100000"/>
         </a:lnSpc>
         <a:spcBef>
-          <a:spcPts val="500"/>
+          <a:spcPts val="1000"/>
         </a:spcBef>
+        <a:buClr>
+          <a:schemeClr val="accent2"/>
+        </a:buClr>
         <a:buFont typeface="Arial" panose="020B0604020202020204" pitchFamily="34" charset="0"/>
         <a:buChar char="•"/>
-        <a:defRPr sz="1800" kern="1200">
+        <a:defRPr sz="1600" kern="1200">
           <a:solidFill>
-            <a:schemeClr val="tx1"/>
+            <a:schemeClr val="tx1">
+              <a:lumMod val="85000"/>
+              <a:lumOff val="15000"/>
+            </a:schemeClr>
           </a:solidFill>
           <a:latin typeface="+mn-lt"/>
           <a:ea typeface="+mn-ea"/>
           <a:cs typeface="+mn-cs"/>
         </a:defRPr>
       </a:lvl4pPr>
-      <a:lvl5pPr marL="2057400" indent="-228600" algn="l" defTabSz="914400" rtl="0" eaLnBrk="1" latinLnBrk="0" hangingPunct="1">
+      <a:lvl5pPr marL="1143000" indent="-228600" algn="l" defTabSz="914400" rtl="0" eaLnBrk="1" latinLnBrk="0" hangingPunct="1">
         <a:lnSpc>
-          <a:spcPct val="90000"/>
+          <a:spcPct val="100000"/>
         </a:lnSpc>
         <a:spcBef>
-          <a:spcPts val="500"/>
+          <a:spcPts val="1000"/>
         </a:spcBef>
+        <a:buClr>
+          <a:schemeClr val="accent2"/>
+        </a:buClr>
         <a:buFont typeface="Arial" panose="020B0604020202020204" pitchFamily="34" charset="0"/>
         <a:buChar char="•"/>
-        <a:defRPr sz="1800" kern="1200">
+        <a:defRPr sz="1600" kern="1200">
           <a:solidFill>
-            <a:schemeClr val="tx1"/>
+            <a:schemeClr val="tx1">
+              <a:lumMod val="85000"/>
+              <a:lumOff val="15000"/>
+            </a:schemeClr>
           </a:solidFill>
           <a:latin typeface="+mn-lt"/>
           <a:ea typeface="+mn-ea"/>
           <a:cs typeface="+mn-cs"/>
         </a:defRPr>
       </a:lvl5pPr>
-      <a:lvl6pPr marL="2514600" indent="-228600" algn="l" defTabSz="914400" rtl="0" eaLnBrk="1" latinLnBrk="0" hangingPunct="1">
+      <a:lvl6pPr marL="1312863" indent="-228600" algn="l" defTabSz="914400" rtl="0" eaLnBrk="1" latinLnBrk="0" hangingPunct="1">
         <a:lnSpc>
-          <a:spcPct val="90000"/>
+          <a:spcPct val="100000"/>
         </a:lnSpc>
         <a:spcBef>
-          <a:spcPts val="500"/>
+          <a:spcPts val="1000"/>
         </a:spcBef>
+        <a:buClr>
+          <a:schemeClr val="accent2"/>
+        </a:buClr>
         <a:buFont typeface="Arial" panose="020B0604020202020204" pitchFamily="34" charset="0"/>
         <a:buChar char="•"/>
-        <a:defRPr sz="1800" kern="1200">
+        <a:defRPr sz="1600" kern="1200">
           <a:solidFill>
             <a:schemeClr val="tx1"/>
           </a:solidFill>
@@ -3171,16 +3114,19 @@
           <a:cs typeface="+mn-cs"/>
         </a:defRPr>
       </a:lvl6pPr>
-      <a:lvl7pPr marL="2971800" indent="-228600" algn="l" defTabSz="914400" rtl="0" eaLnBrk="1" latinLnBrk="0" hangingPunct="1">
+      <a:lvl7pPr marL="1484313" indent="-228600" algn="l" defTabSz="914400" rtl="0" eaLnBrk="1" latinLnBrk="0" hangingPunct="1">
         <a:lnSpc>
-          <a:spcPct val="90000"/>
+          <a:spcPct val="100000"/>
         </a:lnSpc>
         <a:spcBef>
-          <a:spcPts val="500"/>
+          <a:spcPts val="1000"/>
         </a:spcBef>
+        <a:buClr>
+          <a:schemeClr val="accent2"/>
+        </a:buClr>
         <a:buFont typeface="Arial" panose="020B0604020202020204" pitchFamily="34" charset="0"/>
         <a:buChar char="•"/>
-        <a:defRPr sz="1800" kern="1200">
+        <a:defRPr sz="1600" kern="1200">
           <a:solidFill>
             <a:schemeClr val="tx1"/>
           </a:solidFill>
@@ -3189,16 +3135,19 @@
           <a:cs typeface="+mn-cs"/>
         </a:defRPr>
       </a:lvl7pPr>
-      <a:lvl8pPr marL="3429000" indent="-228600" algn="l" defTabSz="914400" rtl="0" eaLnBrk="1" latinLnBrk="0" hangingPunct="1">
+      <a:lvl8pPr marL="1657350" indent="-228600" algn="l" defTabSz="914400" rtl="0" eaLnBrk="1" latinLnBrk="0" hangingPunct="1">
         <a:lnSpc>
-          <a:spcPct val="90000"/>
+          <a:spcPct val="100000"/>
         </a:lnSpc>
         <a:spcBef>
-          <a:spcPts val="500"/>
+          <a:spcPts val="1000"/>
         </a:spcBef>
+        <a:buClr>
+          <a:schemeClr val="accent2"/>
+        </a:buClr>
         <a:buFont typeface="Arial" panose="020B0604020202020204" pitchFamily="34" charset="0"/>
         <a:buChar char="•"/>
-        <a:defRPr sz="1800" kern="1200">
+        <a:defRPr sz="1600" kern="1200" baseline="0">
           <a:solidFill>
             <a:schemeClr val="tx1"/>
           </a:solidFill>
@@ -3207,16 +3156,19 @@
           <a:cs typeface="+mn-cs"/>
         </a:defRPr>
       </a:lvl8pPr>
-      <a:lvl9pPr marL="3886200" indent="-228600" algn="l" defTabSz="914400" rtl="0" eaLnBrk="1" latinLnBrk="0" hangingPunct="1">
+      <a:lvl9pPr marL="1882775" indent="-228600" algn="l" defTabSz="914400" rtl="0" eaLnBrk="1" latinLnBrk="0" hangingPunct="1">
         <a:lnSpc>
-          <a:spcPct val="90000"/>
+          <a:spcPct val="100000"/>
         </a:lnSpc>
         <a:spcBef>
-          <a:spcPts val="500"/>
+          <a:spcPts val="1000"/>
         </a:spcBef>
+        <a:buClr>
+          <a:schemeClr val="accent2"/>
+        </a:buClr>
         <a:buFont typeface="Arial" panose="020B0604020202020204" pitchFamily="34" charset="0"/>
         <a:buChar char="•"/>
-        <a:defRPr sz="1800" kern="1200">
+        <a:defRPr sz="1600" kern="1200" baseline="0">
           <a:solidFill>
             <a:schemeClr val="tx1"/>
           </a:solidFill>
@@ -3228,7 +3180,7 @@
     </p:bodyStyle>
     <p:otherStyle>
       <a:defPPr>
-        <a:defRPr lang="en-TH"/>
+        <a:defRPr lang="en-US"/>
       </a:defPPr>
       <a:lvl1pPr marL="0" algn="l" defTabSz="914400" rtl="0" eaLnBrk="1" latinLnBrk="0" hangingPunct="1">
         <a:defRPr sz="1800" kern="1200">
@@ -3342,12 +3294,72 @@
           <a:chExt cx="0" cy="0"/>
         </a:xfrm>
       </p:grpSpPr>
+      <p:pic>
+        <p:nvPicPr>
+          <p:cNvPr id="5" name="Picture 4" descr="A red logo with three circles&#10;&#10;Description automatically generated">
+            <a:extLst>
+              <a:ext uri="{FF2B5EF4-FFF2-40B4-BE49-F238E27FC236}">
+                <a16:creationId xmlns:a16="http://schemas.microsoft.com/office/drawing/2014/main" id="{7A6E46EC-776B-69D4-4486-63BE9310A07D}"/>
+              </a:ext>
+            </a:extLst>
+          </p:cNvPr>
+          <p:cNvPicPr>
+            <a:picLocks noChangeAspect="1"/>
+          </p:cNvPicPr>
+          <p:nvPr/>
+        </p:nvPicPr>
+        <p:blipFill>
+          <a:blip r:embed="rId2"/>
+          <a:stretch>
+            <a:fillRect/>
+          </a:stretch>
+        </p:blipFill>
+        <p:spPr>
+          <a:xfrm>
+            <a:off x="2667000" y="0"/>
+            <a:ext cx="6858000" cy="6858000"/>
+          </a:xfrm>
+          <a:prstGeom prst="ellipse">
+            <a:avLst/>
+          </a:prstGeom>
+        </p:spPr>
+      </p:pic>
+    </p:spTree>
+    <p:extLst>
+      <p:ext uri="{BB962C8B-B14F-4D97-AF65-F5344CB8AC3E}">
+        <p14:creationId xmlns:p14="http://schemas.microsoft.com/office/powerpoint/2010/main" val="701746970"/>
+      </p:ext>
+    </p:extLst>
+  </p:cSld>
+  <p:clrMapOvr>
+    <a:masterClrMapping/>
+  </p:clrMapOvr>
+</p:sld>
+</file>
+
+<file path=ppt/slides/slide2.xml><?xml version="1.0" encoding="utf-8"?>
+<p:sld xmlns:a="http://schemas.openxmlformats.org/drawingml/2006/main" xmlns:r="http://schemas.openxmlformats.org/officeDocument/2006/relationships" xmlns:p="http://schemas.openxmlformats.org/presentationml/2006/main">
+  <p:cSld>
+    <p:spTree>
+      <p:nvGrpSpPr>
+        <p:cNvPr id="1" name=""/>
+        <p:cNvGrpSpPr/>
+        <p:nvPr/>
+      </p:nvGrpSpPr>
+      <p:grpSpPr>
+        <a:xfrm>
+          <a:off x="0" y="0"/>
+          <a:ext cx="0" cy="0"/>
+          <a:chOff x="0" y="0"/>
+          <a:chExt cx="0" cy="0"/>
+        </a:xfrm>
+      </p:grpSpPr>
       <p:grpSp>
         <p:nvGrpSpPr>
-          <p:cNvPr id="10" name="Group 9">
+          <p:cNvPr id="17" name="Group 16">
             <a:extLst>
               <a:ext uri="{FF2B5EF4-FFF2-40B4-BE49-F238E27FC236}">
-                <a16:creationId xmlns:a16="http://schemas.microsoft.com/office/drawing/2014/main" id="{2E19D923-50C1-169F-1B64-4BABD2D46C02}"/>
+                <a16:creationId xmlns:a16="http://schemas.microsoft.com/office/drawing/2014/main" id="{F3F7BF90-6005-0057-EFFA-FBABE7DEED59}"/>
               </a:ext>
             </a:extLst>
           </p:cNvPr>
@@ -3356,18 +3368,18 @@
         </p:nvGrpSpPr>
         <p:grpSpPr>
           <a:xfrm>
-            <a:off x="2667000" y="0"/>
-            <a:ext cx="6858000" cy="6858000"/>
-            <a:chOff x="2495551" y="0"/>
-            <a:chExt cx="6858000" cy="6858000"/>
+            <a:off x="2669381" y="4763"/>
+            <a:ext cx="6853237" cy="6853237"/>
+            <a:chOff x="2669381" y="4763"/>
+            <a:chExt cx="6853237" cy="6853237"/>
           </a:xfrm>
         </p:grpSpPr>
         <p:sp>
           <p:nvSpPr>
-            <p:cNvPr id="9" name="Oval 8">
+            <p:cNvPr id="14" name="Oval 13">
               <a:extLst>
                 <a:ext uri="{FF2B5EF4-FFF2-40B4-BE49-F238E27FC236}">
-                  <a16:creationId xmlns:a16="http://schemas.microsoft.com/office/drawing/2014/main" id="{C284D2E5-B6FA-FE17-AA64-8B059CBE95EB}"/>
+                  <a16:creationId xmlns:a16="http://schemas.microsoft.com/office/drawing/2014/main" id="{7AA55543-6493-9A8E-1717-A1F22F81DA77}"/>
                 </a:ext>
               </a:extLst>
             </p:cNvPr>
@@ -3376,8 +3388,8 @@
           </p:nvSpPr>
           <p:spPr>
             <a:xfrm>
-              <a:off x="2495551" y="0"/>
-              <a:ext cx="6858000" cy="6858000"/>
+              <a:off x="2669381" y="4763"/>
+              <a:ext cx="6853237" cy="6853237"/>
             </a:xfrm>
             <a:prstGeom prst="ellipse">
               <a:avLst/>
@@ -3408,16 +3420,16 @@
             <a:lstStyle/>
             <a:p>
               <a:pPr algn="ctr"/>
-              <a:endParaRPr lang="en-TH" dirty="0"/>
+              <a:endParaRPr lang="en-TH"/>
             </a:p>
           </p:txBody>
         </p:sp>
         <p:pic>
           <p:nvPicPr>
-            <p:cNvPr id="7" name="Graphic 6" descr="Users with solid fill">
+            <p:cNvPr id="16" name="Graphic 15" descr="Users with solid fill">
               <a:extLst>
                 <a:ext uri="{FF2B5EF4-FFF2-40B4-BE49-F238E27FC236}">
-                  <a16:creationId xmlns:a16="http://schemas.microsoft.com/office/drawing/2014/main" id="{E82AA387-543C-EE8B-6C6E-790CE1D4E002}"/>
+                  <a16:creationId xmlns:a16="http://schemas.microsoft.com/office/drawing/2014/main" id="{ED0A6DF3-E3EB-76E7-41D1-AB717BE471CB}"/>
                 </a:ext>
               </a:extLst>
             </p:cNvPr>
@@ -3440,8 +3452,8 @@
           </p:blipFill>
           <p:spPr>
             <a:xfrm>
-              <a:off x="3009900" y="342900"/>
-              <a:ext cx="6172200" cy="6172200"/>
+              <a:off x="2978943" y="311944"/>
+              <a:ext cx="6234112" cy="6234112"/>
             </a:xfrm>
             <a:prstGeom prst="rect">
               <a:avLst/>
@@ -3463,108 +3475,58 @@
 </file>
 
 <file path=ppt/theme/theme1.xml><?xml version="1.0" encoding="utf-8"?>
-<a:theme xmlns:a="http://schemas.openxmlformats.org/drawingml/2006/main" name="Office Theme">
+<a:theme xmlns:a="http://schemas.openxmlformats.org/drawingml/2006/main" name="Parcel">
   <a:themeElements>
-    <a:clrScheme name="Office">
+    <a:clrScheme name="Parcel">
       <a:dk1>
-        <a:sysClr val="windowText" lastClr="000000"/>
+        <a:srgbClr val="000000"/>
       </a:dk1>
       <a:lt1>
-        <a:sysClr val="window" lastClr="FFFFFF"/>
+        <a:srgbClr val="FFFFFF"/>
       </a:lt1>
       <a:dk2>
-        <a:srgbClr val="0E2841"/>
+        <a:srgbClr val="4A5356"/>
       </a:dk2>
       <a:lt2>
-        <a:srgbClr val="E8E8E8"/>
+        <a:srgbClr val="E8E3CE"/>
       </a:lt2>
       <a:accent1>
-        <a:srgbClr val="156082"/>
+        <a:srgbClr val="F6A21D"/>
       </a:accent1>
       <a:accent2>
-        <a:srgbClr val="E97132"/>
+        <a:srgbClr val="9BAFB5"/>
       </a:accent2>
       <a:accent3>
-        <a:srgbClr val="196B24"/>
+        <a:srgbClr val="C96731"/>
       </a:accent3>
       <a:accent4>
-        <a:srgbClr val="0F9ED5"/>
+        <a:srgbClr val="9CA383"/>
       </a:accent4>
       <a:accent5>
-        <a:srgbClr val="A02B93"/>
+        <a:srgbClr val="87795D"/>
       </a:accent5>
       <a:accent6>
-        <a:srgbClr val="4EA72E"/>
+        <a:srgbClr val="A0988C"/>
       </a:accent6>
       <a:hlink>
-        <a:srgbClr val="467886"/>
+        <a:srgbClr val="00B0F0"/>
       </a:hlink>
       <a:folHlink>
-        <a:srgbClr val="96607D"/>
+        <a:srgbClr val="738F97"/>
       </a:folHlink>
     </a:clrScheme>
-    <a:fontScheme name="Office">
+    <a:fontScheme name="Parcel">
       <a:majorFont>
-        <a:latin typeface="Aptos Display" panose="02110004020202020204"/>
+        <a:latin typeface="Gill Sans MT" panose="020B0502020104020203"/>
         <a:ea typeface=""/>
         <a:cs typeface=""/>
-        <a:font script="Jpan" typeface="游ゴシック Light"/>
-        <a:font script="Hang" typeface="맑은 고딕"/>
-        <a:font script="Hans" typeface="等线 Light"/>
-        <a:font script="Hant" typeface="新細明體"/>
-        <a:font script="Arab" typeface="Times New Roman"/>
-        <a:font script="Hebr" typeface="Times New Roman"/>
-        <a:font script="Thai" typeface="Angsana New"/>
-        <a:font script="Ethi" typeface="Nyala"/>
-        <a:font script="Beng" typeface="Vrinda"/>
-        <a:font script="Gujr" typeface="Shruti"/>
-        <a:font script="Khmr" typeface="MoolBoran"/>
-        <a:font script="Knda" typeface="Tunga"/>
-        <a:font script="Guru" typeface="Raavi"/>
-        <a:font script="Cans" typeface="Euphemia"/>
-        <a:font script="Cher" typeface="Plantagenet Cherokee"/>
-        <a:font script="Yiii" typeface="Microsoft Yi Baiti"/>
-        <a:font script="Tibt" typeface="Microsoft Himalaya"/>
-        <a:font script="Thaa" typeface="MV Boli"/>
-        <a:font script="Deva" typeface="Mangal"/>
-        <a:font script="Telu" typeface="Gautami"/>
-        <a:font script="Taml" typeface="Latha"/>
-        <a:font script="Syrc" typeface="Estrangelo Edessa"/>
-        <a:font script="Orya" typeface="Kalinga"/>
-        <a:font script="Mlym" typeface="Kartika"/>
-        <a:font script="Laoo" typeface="DokChampa"/>
-        <a:font script="Sinh" typeface="Iskoola Pota"/>
-        <a:font script="Mong" typeface="Mongolian Baiti"/>
-        <a:font script="Viet" typeface="Times New Roman"/>
-        <a:font script="Uigh" typeface="Microsoft Uighur"/>
-        <a:font script="Geor" typeface="Sylfaen"/>
-        <a:font script="Armn" typeface="Arial"/>
-        <a:font script="Bugi" typeface="Leelawadee UI"/>
-        <a:font script="Bopo" typeface="Microsoft JhengHei"/>
-        <a:font script="Java" typeface="Javanese Text"/>
-        <a:font script="Lisu" typeface="Segoe UI"/>
-        <a:font script="Mymr" typeface="Myanmar Text"/>
-        <a:font script="Nkoo" typeface="Ebrima"/>
-        <a:font script="Olck" typeface="Nirmala UI"/>
-        <a:font script="Osma" typeface="Ebrima"/>
-        <a:font script="Phag" typeface="Phagspa"/>
-        <a:font script="Syrn" typeface="Estrangelo Edessa"/>
-        <a:font script="Syrj" typeface="Estrangelo Edessa"/>
-        <a:font script="Syre" typeface="Estrangelo Edessa"/>
-        <a:font script="Sora" typeface="Nirmala UI"/>
-        <a:font script="Tale" typeface="Microsoft Tai Le"/>
-        <a:font script="Talu" typeface="Microsoft New Tai Lue"/>
-        <a:font script="Tfng" typeface="Ebrima"/>
-      </a:majorFont>
-      <a:minorFont>
-        <a:latin typeface="Aptos" panose="02110004020202020204"/>
-        <a:ea typeface=""/>
-        <a:cs typeface=""/>
-        <a:font script="Jpan" typeface="游ゴシック"/>
-        <a:font script="Hang" typeface="맑은 고딕"/>
-        <a:font script="Hans" typeface="等线"/>
-        <a:font script="Hant" typeface="新細明體"/>
-        <a:font script="Arab" typeface="Arial"/>
+        <a:font script="Grek" typeface="Corbel"/>
+        <a:font script="Cyrl" typeface="Corbel"/>
+        <a:font script="Jpan" typeface="HGｺﾞｼｯｸE"/>
+        <a:font script="Hang" typeface="휴먼매직체"/>
+        <a:font script="Hans" typeface="华文中宋"/>
+        <a:font script="Hant" typeface="微軟正黑體"/>
+        <a:font script="Arab" typeface="Majalla UI"/>
         <a:font script="Hebr" typeface="Arial"/>
         <a:font script="Thai" typeface="Cordia New"/>
         <a:font script="Ethi" typeface="Nyala"/>
@@ -3587,29 +3549,49 @@
         <a:font script="Laoo" typeface="DokChampa"/>
         <a:font script="Sinh" typeface="Iskoola Pota"/>
         <a:font script="Mong" typeface="Mongolian Baiti"/>
-        <a:font script="Viet" typeface="Arial"/>
+        <a:font script="Viet" typeface="Tahoma"/>
         <a:font script="Uigh" typeface="Microsoft Uighur"/>
         <a:font script="Geor" typeface="Sylfaen"/>
-        <a:font script="Armn" typeface="Arial"/>
-        <a:font script="Bugi" typeface="Leelawadee UI"/>
-        <a:font script="Bopo" typeface="Microsoft JhengHei"/>
-        <a:font script="Java" typeface="Javanese Text"/>
-        <a:font script="Lisu" typeface="Segoe UI"/>
-        <a:font script="Mymr" typeface="Myanmar Text"/>
-        <a:font script="Nkoo" typeface="Ebrima"/>
-        <a:font script="Olck" typeface="Nirmala UI"/>
-        <a:font script="Osma" typeface="Ebrima"/>
-        <a:font script="Phag" typeface="Phagspa"/>
-        <a:font script="Syrn" typeface="Estrangelo Edessa"/>
-        <a:font script="Syrj" typeface="Estrangelo Edessa"/>
-        <a:font script="Syre" typeface="Estrangelo Edessa"/>
-        <a:font script="Sora" typeface="Nirmala UI"/>
-        <a:font script="Tale" typeface="Microsoft Tai Le"/>
-        <a:font script="Talu" typeface="Microsoft New Tai Lue"/>
-        <a:font script="Tfng" typeface="Ebrima"/>
+      </a:majorFont>
+      <a:minorFont>
+        <a:latin typeface="Gill Sans MT" panose="020B0502020104020203"/>
+        <a:ea typeface=""/>
+        <a:cs typeface=""/>
+        <a:font script="Grek" typeface="Corbel"/>
+        <a:font script="Cyrl" typeface="Corbel"/>
+        <a:font script="Jpan" typeface="HGｺﾞｼｯｸE"/>
+        <a:font script="Hang" typeface="휴먼매직체"/>
+        <a:font script="Hans" typeface="华文中宋"/>
+        <a:font script="Hant" typeface="微軟正黑體"/>
+        <a:font script="Arab" typeface="Majalla UI"/>
+        <a:font script="Hebr" typeface="Arial"/>
+        <a:font script="Thai" typeface="Cordia New"/>
+        <a:font script="Ethi" typeface="Nyala"/>
+        <a:font script="Beng" typeface="Vrinda"/>
+        <a:font script="Gujr" typeface="Shruti"/>
+        <a:font script="Khmr" typeface="DaunPenh"/>
+        <a:font script="Knda" typeface="Tunga"/>
+        <a:font script="Guru" typeface="Raavi"/>
+        <a:font script="Cans" typeface="Euphemia"/>
+        <a:font script="Cher" typeface="Plantagenet Cherokee"/>
+        <a:font script="Yiii" typeface="Microsoft Yi Baiti"/>
+        <a:font script="Tibt" typeface="Microsoft Himalaya"/>
+        <a:font script="Thaa" typeface="MV Boli"/>
+        <a:font script="Deva" typeface="Mangal"/>
+        <a:font script="Telu" typeface="Gautami"/>
+        <a:font script="Taml" typeface="Latha"/>
+        <a:font script="Syrc" typeface="Estrangelo Edessa"/>
+        <a:font script="Orya" typeface="Kalinga"/>
+        <a:font script="Mlym" typeface="Kartika"/>
+        <a:font script="Laoo" typeface="DokChampa"/>
+        <a:font script="Sinh" typeface="Iskoola Pota"/>
+        <a:font script="Mong" typeface="Mongolian Baiti"/>
+        <a:font script="Viet" typeface="Tahoma"/>
+        <a:font script="Uigh" typeface="Microsoft Uighur"/>
+        <a:font script="Geor" typeface="Sylfaen"/>
       </a:minorFont>
     </a:fontScheme>
-    <a:fmtScheme name="Office">
+    <a:fmtScheme name="Parcel">
       <a:fillStyleLst>
         <a:solidFill>
           <a:schemeClr val="phClr"/>
@@ -3618,23 +3600,16 @@
           <a:gsLst>
             <a:gs pos="0">
               <a:schemeClr val="phClr">
-                <a:lumMod val="110000"/>
-                <a:satMod val="105000"/>
-                <a:tint val="67000"/>
-              </a:schemeClr>
-            </a:gs>
-            <a:gs pos="50000">
-              <a:schemeClr val="phClr">
-                <a:lumMod val="105000"/>
-                <a:satMod val="103000"/>
-                <a:tint val="73000"/>
+                <a:tint val="80000"/>
+                <a:satMod val="107000"/>
+                <a:lumMod val="103000"/>
               </a:schemeClr>
             </a:gs>
             <a:gs pos="100000">
               <a:schemeClr val="phClr">
-                <a:lumMod val="105000"/>
+                <a:tint val="82000"/>
                 <a:satMod val="109000"/>
-                <a:tint val="81000"/>
+                <a:lumMod val="103000"/>
               </a:schemeClr>
             </a:gs>
           </a:gsLst>
@@ -3644,23 +3619,23 @@
           <a:gsLst>
             <a:gs pos="0">
               <a:schemeClr val="phClr">
-                <a:satMod val="103000"/>
+                <a:tint val="97000"/>
+                <a:satMod val="100000"/>
                 <a:lumMod val="102000"/>
-                <a:tint val="94000"/>
               </a:schemeClr>
             </a:gs>
             <a:gs pos="50000">
               <a:schemeClr val="phClr">
-                <a:satMod val="110000"/>
+                <a:shade val="100000"/>
+                <a:satMod val="103000"/>
                 <a:lumMod val="100000"/>
-                <a:shade val="100000"/>
               </a:schemeClr>
             </a:gs>
             <a:gs pos="100000">
               <a:schemeClr val="phClr">
+                <a:shade val="93000"/>
+                <a:satMod val="110000"/>
                 <a:lumMod val="99000"/>
-                <a:satMod val="120000"/>
-                <a:shade val="78000"/>
               </a:schemeClr>
             </a:gs>
           </a:gsLst>
@@ -3668,26 +3643,23 @@
         </a:gradFill>
       </a:fillStyleLst>
       <a:lnStyleLst>
+        <a:ln w="6350" cap="flat" cmpd="sng" algn="ctr">
+          <a:solidFill>
+            <a:schemeClr val="phClr"/>
+          </a:solidFill>
+          <a:prstDash val="solid"/>
+        </a:ln>
         <a:ln w="12700" cap="flat" cmpd="sng" algn="ctr">
           <a:solidFill>
             <a:schemeClr val="phClr"/>
           </a:solidFill>
           <a:prstDash val="solid"/>
-          <a:miter lim="800000"/>
         </a:ln>
-        <a:ln w="19050" cap="flat" cmpd="sng" algn="ctr">
+        <a:ln w="31750" cap="flat" cmpd="sng" algn="ctr">
           <a:solidFill>
             <a:schemeClr val="phClr"/>
           </a:solidFill>
           <a:prstDash val="solid"/>
-          <a:miter lim="800000"/>
-        </a:ln>
-        <a:ln w="25400" cap="flat" cmpd="sng" algn="ctr">
-          <a:solidFill>
-            <a:schemeClr val="phClr"/>
-          </a:solidFill>
-          <a:prstDash val="solid"/>
-          <a:miter lim="800000"/>
         </a:ln>
       </a:lnStyleLst>
       <a:effectStyleLst>
@@ -3699,12 +3671,21 @@
         </a:effectStyle>
         <a:effectStyle>
           <a:effectLst>
-            <a:outerShdw blurRad="57150" dist="19050" dir="5400000" algn="ctr" rotWithShape="0">
+            <a:outerShdw blurRad="55880" dist="15240" dir="5400000" algn="ctr" rotWithShape="0">
               <a:srgbClr val="000000">
-                <a:alpha val="63000"/>
+                <a:alpha val="45000"/>
               </a:srgbClr>
             </a:outerShdw>
           </a:effectLst>
+          <a:scene3d>
+            <a:camera prst="orthographicFront">
+              <a:rot lat="0" lon="0" rev="0"/>
+            </a:camera>
+            <a:lightRig rig="brightRoom" dir="tl"/>
+          </a:scene3d>
+          <a:sp3d prstMaterial="dkEdge">
+            <a:bevelT w="0" h="0"/>
+          </a:sp3d>
         </a:effectStyle>
       </a:effectStyleLst>
       <a:bgFillStyleLst>
@@ -3721,57 +3702,33 @@
           <a:gsLst>
             <a:gs pos="0">
               <a:schemeClr val="phClr">
-                <a:tint val="93000"/>
-                <a:satMod val="150000"/>
-                <a:shade val="98000"/>
-                <a:lumMod val="102000"/>
-              </a:schemeClr>
-            </a:gs>
-            <a:gs pos="50000">
-              <a:schemeClr val="phClr">
-                <a:tint val="98000"/>
-                <a:satMod val="130000"/>
-                <a:shade val="90000"/>
-                <a:lumMod val="103000"/>
+                <a:tint val="97000"/>
+                <a:shade val="100000"/>
+                <a:satMod val="185000"/>
+                <a:lumMod val="120000"/>
               </a:schemeClr>
             </a:gs>
             <a:gs pos="100000">
               <a:schemeClr val="phClr">
-                <a:shade val="63000"/>
-                <a:satMod val="120000"/>
+                <a:tint val="96000"/>
+                <a:shade val="95000"/>
+                <a:satMod val="215000"/>
+                <a:lumMod val="80000"/>
               </a:schemeClr>
             </a:gs>
           </a:gsLst>
-          <a:lin ang="5400000" scaled="0"/>
+          <a:path path="circle">
+            <a:fillToRect l="50000" t="55000" r="125000" b="100000"/>
+          </a:path>
         </a:gradFill>
       </a:bgFillStyleLst>
     </a:fmtScheme>
   </a:themeElements>
-  <a:objectDefaults>
-    <a:lnDef>
-      <a:spPr/>
-      <a:bodyPr/>
-      <a:lstStyle/>
-      <a:style>
-        <a:lnRef idx="2">
-          <a:schemeClr val="accent1"/>
-        </a:lnRef>
-        <a:fillRef idx="0">
-          <a:schemeClr val="accent1"/>
-        </a:fillRef>
-        <a:effectRef idx="1">
-          <a:schemeClr val="accent1"/>
-        </a:effectRef>
-        <a:fontRef idx="minor">
-          <a:schemeClr val="tx1"/>
-        </a:fontRef>
-      </a:style>
-    </a:lnDef>
-  </a:objectDefaults>
+  <a:objectDefaults/>
   <a:extraClrSchemeLst/>
   <a:extLst>
     <a:ext uri="{05A4C25C-085E-4340-85A3-A5531E510DB2}">
-      <thm15:themeFamily xmlns:thm15="http://schemas.microsoft.com/office/thememl/2012/main" name="Office Theme" id="{2E142A2C-CD16-42D6-873A-C26D2A0506FA}" vid="{1BDDFF52-6CD6-40A5-AB3C-68EB2F1E4D0A}"/>
+      <thm15:themeFamily xmlns:thm15="http://schemas.microsoft.com/office/thememl/2012/main" name="Parcel" id="{8BEC4385-4EB9-4D53-BFB5-0EA123736B6D}" vid="{4DB32801-28C0-48B0-8C1D-A9A58613615A}"/>
     </a:ext>
   </a:extLst>
 </a:theme>
